--- a/docs/pptx/carbo/ritu-carbo-linsubhr-ratio-anemia2_10pct.pptx
+++ b/docs/pptx/carbo/ritu-carbo-linsubhr-ratio-anemia2_10pct.pptx
@@ -2443,7 +2443,7 @@
           </p:nvSpPr>
           <p:spPr>
             <a:xfrm>
-              <a:off x="973953" y="2073503"/>
+              <a:off x="974732" y="2073503"/>
               <a:ext cx="0" cy="3649639"/>
             </a:xfrm>
             <a:custGeom>
@@ -2486,7 +2486,7 @@
           </p:nvSpPr>
           <p:spPr>
             <a:xfrm>
-              <a:off x="1881787" y="2073503"/>
+              <a:off x="1882345" y="2073503"/>
               <a:ext cx="0" cy="3649639"/>
             </a:xfrm>
             <a:custGeom>
@@ -2529,7 +2529,7 @@
           </p:nvSpPr>
           <p:spPr>
             <a:xfrm>
-              <a:off x="2789620" y="2073503"/>
+              <a:off x="2789957" y="2073503"/>
               <a:ext cx="0" cy="3649639"/>
             </a:xfrm>
             <a:custGeom>
@@ -2572,7 +2572,7 @@
           </p:nvSpPr>
           <p:spPr>
             <a:xfrm>
-              <a:off x="3697454" y="2073503"/>
+              <a:off x="3697570" y="2073503"/>
               <a:ext cx="0" cy="3649639"/>
             </a:xfrm>
             <a:custGeom>
@@ -2615,7 +2615,7 @@
           </p:nvSpPr>
           <p:spPr>
             <a:xfrm>
-              <a:off x="4605287" y="2073503"/>
+              <a:off x="4605182" y="2073503"/>
               <a:ext cx="0" cy="3649639"/>
             </a:xfrm>
             <a:custGeom>
@@ -2658,7 +2658,7 @@
           </p:nvSpPr>
           <p:spPr>
             <a:xfrm>
-              <a:off x="5513120" y="2073503"/>
+              <a:off x="5512795" y="2073503"/>
               <a:ext cx="0" cy="3649639"/>
             </a:xfrm>
             <a:custGeom>
@@ -2701,7 +2701,7 @@
           </p:nvSpPr>
           <p:spPr>
             <a:xfrm>
-              <a:off x="6420954" y="2073503"/>
+              <a:off x="6420407" y="2073503"/>
               <a:ext cx="0" cy="3649639"/>
             </a:xfrm>
             <a:custGeom>
@@ -2744,7 +2744,7 @@
           </p:nvSpPr>
           <p:spPr>
             <a:xfrm>
-              <a:off x="7328787" y="2073503"/>
+              <a:off x="7328020" y="2073503"/>
               <a:ext cx="0" cy="3649639"/>
             </a:xfrm>
             <a:custGeom>
@@ -2787,7 +2787,7 @@
           </p:nvSpPr>
           <p:spPr>
             <a:xfrm>
-              <a:off x="8236620" y="2073503"/>
+              <a:off x="8235632" y="2073503"/>
               <a:ext cx="0" cy="3649639"/>
             </a:xfrm>
             <a:custGeom>
@@ -3045,7 +3045,7 @@
           </p:nvSpPr>
           <p:spPr>
             <a:xfrm>
-              <a:off x="1427870" y="2073503"/>
+              <a:off x="1428538" y="2073503"/>
               <a:ext cx="0" cy="3649639"/>
             </a:xfrm>
             <a:custGeom>
@@ -3088,7 +3088,7 @@
           </p:nvSpPr>
           <p:spPr>
             <a:xfrm>
-              <a:off x="2335703" y="2073503"/>
+              <a:off x="2336151" y="2073503"/>
               <a:ext cx="0" cy="3649639"/>
             </a:xfrm>
             <a:custGeom>
@@ -3131,7 +3131,7 @@
           </p:nvSpPr>
           <p:spPr>
             <a:xfrm>
-              <a:off x="3243537" y="2073503"/>
+              <a:off x="3243764" y="2073503"/>
               <a:ext cx="0" cy="3649639"/>
             </a:xfrm>
             <a:custGeom>
@@ -3174,7 +3174,7 @@
           </p:nvSpPr>
           <p:spPr>
             <a:xfrm>
-              <a:off x="4151370" y="2073503"/>
+              <a:off x="4151376" y="2073503"/>
               <a:ext cx="0" cy="3649639"/>
             </a:xfrm>
             <a:custGeom>
@@ -3217,7 +3217,7 @@
           </p:nvSpPr>
           <p:spPr>
             <a:xfrm>
-              <a:off x="5059204" y="2073503"/>
+              <a:off x="5058989" y="2073503"/>
               <a:ext cx="0" cy="3649639"/>
             </a:xfrm>
             <a:custGeom>
@@ -3260,7 +3260,7 @@
           </p:nvSpPr>
           <p:spPr>
             <a:xfrm>
-              <a:off x="5967037" y="2073503"/>
+              <a:off x="5966601" y="2073503"/>
               <a:ext cx="0" cy="3649639"/>
             </a:xfrm>
             <a:custGeom>
@@ -3303,7 +3303,7 @@
           </p:nvSpPr>
           <p:spPr>
             <a:xfrm>
-              <a:off x="6874870" y="2073503"/>
+              <a:off x="6874214" y="2073503"/>
               <a:ext cx="0" cy="3649639"/>
             </a:xfrm>
             <a:custGeom>
@@ -3346,7 +3346,7 @@
           </p:nvSpPr>
           <p:spPr>
             <a:xfrm>
-              <a:off x="7782704" y="2073503"/>
+              <a:off x="7781826" y="2073503"/>
               <a:ext cx="0" cy="3649639"/>
             </a:xfrm>
             <a:custGeom>
@@ -3390,608 +3390,608 @@
           <p:spPr>
             <a:xfrm>
               <a:off x="1172049" y="2073503"/>
-              <a:ext cx="7090630" cy="3363035"/>
+              <a:ext cx="7090630" cy="3360109"/>
             </a:xfrm>
             <a:custGeom>
               <a:avLst/>
               <a:pathLst>
-                <a:path w="7090630" h="3363035">
+                <a:path w="7090630" h="3360109">
                   <a:moveTo>
-                    <a:pt x="98106" y="0"/>
+                    <a:pt x="103277" y="0"/>
                   </a:moveTo>
                   <a:lnTo>
-                    <a:pt x="143245" y="75268"/>
-                  </a:lnTo>
-                  <a:lnTo>
-                    <a:pt x="214867" y="190655"/>
-                  </a:lnTo>
-                  <a:lnTo>
-                    <a:pt x="286490" y="302137"/>
-                  </a:lnTo>
-                  <a:lnTo>
-                    <a:pt x="358112" y="409844"/>
-                  </a:lnTo>
-                  <a:lnTo>
-                    <a:pt x="429735" y="513905"/>
-                  </a:lnTo>
-                  <a:lnTo>
-                    <a:pt x="501357" y="614443"/>
-                  </a:lnTo>
-                  <a:lnTo>
-                    <a:pt x="572980" y="711578"/>
-                  </a:lnTo>
-                  <a:lnTo>
-                    <a:pt x="644602" y="805425"/>
-                  </a:lnTo>
-                  <a:lnTo>
-                    <a:pt x="716225" y="896094"/>
-                  </a:lnTo>
-                  <a:lnTo>
-                    <a:pt x="787847" y="983694"/>
-                  </a:lnTo>
-                  <a:lnTo>
-                    <a:pt x="859470" y="1068328"/>
-                  </a:lnTo>
-                  <a:lnTo>
-                    <a:pt x="931092" y="1150098"/>
-                  </a:lnTo>
-                  <a:lnTo>
-                    <a:pt x="1002715" y="1229099"/>
-                  </a:lnTo>
-                  <a:lnTo>
-                    <a:pt x="1074337" y="1305426"/>
-                  </a:lnTo>
-                  <a:lnTo>
-                    <a:pt x="1145960" y="1379169"/>
-                  </a:lnTo>
-                  <a:lnTo>
-                    <a:pt x="1217582" y="1450415"/>
-                  </a:lnTo>
-                  <a:lnTo>
-                    <a:pt x="1289205" y="1519250"/>
-                  </a:lnTo>
-                  <a:lnTo>
-                    <a:pt x="1360827" y="1585754"/>
-                  </a:lnTo>
-                  <a:lnTo>
-                    <a:pt x="1432450" y="1650007"/>
-                  </a:lnTo>
-                  <a:lnTo>
-                    <a:pt x="1504073" y="1712084"/>
-                  </a:lnTo>
-                  <a:lnTo>
-                    <a:pt x="1575695" y="1772061"/>
-                  </a:lnTo>
-                  <a:lnTo>
-                    <a:pt x="1647318" y="1830006"/>
-                  </a:lnTo>
-                  <a:lnTo>
-                    <a:pt x="1718940" y="1885991"/>
-                  </a:lnTo>
-                  <a:lnTo>
-                    <a:pt x="1790563" y="1940080"/>
-                  </a:lnTo>
-                  <a:lnTo>
-                    <a:pt x="1862185" y="1992337"/>
-                  </a:lnTo>
-                  <a:lnTo>
-                    <a:pt x="1933808" y="2042826"/>
-                  </a:lnTo>
-                  <a:lnTo>
-                    <a:pt x="2005430" y="2091606"/>
-                  </a:lnTo>
-                  <a:lnTo>
-                    <a:pt x="2077053" y="2138734"/>
-                  </a:lnTo>
-                  <a:lnTo>
-                    <a:pt x="2148675" y="2184267"/>
-                  </a:lnTo>
-                  <a:lnTo>
-                    <a:pt x="2220298" y="2228258"/>
-                  </a:lnTo>
-                  <a:lnTo>
-                    <a:pt x="2291920" y="2270760"/>
-                  </a:lnTo>
-                  <a:lnTo>
-                    <a:pt x="2363543" y="2311824"/>
-                  </a:lnTo>
-                  <a:lnTo>
-                    <a:pt x="2435165" y="2351497"/>
-                  </a:lnTo>
-                  <a:lnTo>
-                    <a:pt x="2506788" y="2389827"/>
-                  </a:lnTo>
-                  <a:lnTo>
-                    <a:pt x="2578410" y="2426860"/>
-                  </a:lnTo>
-                  <a:lnTo>
-                    <a:pt x="2650033" y="2462638"/>
-                  </a:lnTo>
-                  <a:lnTo>
-                    <a:pt x="2721655" y="2497206"/>
-                  </a:lnTo>
-                  <a:lnTo>
-                    <a:pt x="2793278" y="2530604"/>
-                  </a:lnTo>
-                  <a:lnTo>
-                    <a:pt x="2864901" y="2562870"/>
-                  </a:lnTo>
-                  <a:lnTo>
-                    <a:pt x="2936523" y="2594045"/>
-                  </a:lnTo>
-                  <a:lnTo>
-                    <a:pt x="3008146" y="2624164"/>
-                  </a:lnTo>
-                  <a:lnTo>
-                    <a:pt x="3079768" y="2653263"/>
-                  </a:lnTo>
-                  <a:lnTo>
-                    <a:pt x="3151391" y="2659271"/>
-                  </a:lnTo>
-                  <a:lnTo>
-                    <a:pt x="3223013" y="2664412"/>
-                  </a:lnTo>
-                  <a:lnTo>
-                    <a:pt x="3294636" y="2669521"/>
-                  </a:lnTo>
-                  <a:lnTo>
-                    <a:pt x="3366258" y="2674598"/>
-                  </a:lnTo>
-                  <a:lnTo>
-                    <a:pt x="3437881" y="2679643"/>
-                  </a:lnTo>
-                  <a:lnTo>
-                    <a:pt x="3509503" y="2684657"/>
-                  </a:lnTo>
-                  <a:lnTo>
-                    <a:pt x="3581126" y="2689639"/>
-                  </a:lnTo>
-                  <a:lnTo>
-                    <a:pt x="3652748" y="2694591"/>
-                  </a:lnTo>
-                  <a:lnTo>
-                    <a:pt x="3724371" y="2699511"/>
-                  </a:lnTo>
-                  <a:lnTo>
-                    <a:pt x="3795993" y="2704401"/>
-                  </a:lnTo>
-                  <a:lnTo>
-                    <a:pt x="3867616" y="2709261"/>
-                  </a:lnTo>
-                  <a:lnTo>
-                    <a:pt x="3939238" y="2714090"/>
-                  </a:lnTo>
-                  <a:lnTo>
-                    <a:pt x="4010861" y="2718889"/>
-                  </a:lnTo>
-                  <a:lnTo>
-                    <a:pt x="4082483" y="2723658"/>
-                  </a:lnTo>
-                  <a:lnTo>
-                    <a:pt x="4154106" y="2728397"/>
-                  </a:lnTo>
-                  <a:lnTo>
-                    <a:pt x="4225729" y="2733107"/>
-                  </a:lnTo>
-                  <a:lnTo>
-                    <a:pt x="4297351" y="2737788"/>
-                  </a:lnTo>
-                  <a:lnTo>
-                    <a:pt x="4368974" y="2742439"/>
-                  </a:lnTo>
-                  <a:lnTo>
-                    <a:pt x="4440596" y="2747061"/>
-                  </a:lnTo>
-                  <a:lnTo>
-                    <a:pt x="4512219" y="2751655"/>
-                  </a:lnTo>
-                  <a:lnTo>
-                    <a:pt x="4583841" y="2756220"/>
-                  </a:lnTo>
-                  <a:lnTo>
-                    <a:pt x="4655464" y="2760756"/>
-                  </a:lnTo>
-                  <a:lnTo>
-                    <a:pt x="4727086" y="2765264"/>
-                  </a:lnTo>
-                  <a:lnTo>
-                    <a:pt x="4798709" y="2769744"/>
-                  </a:lnTo>
-                  <a:lnTo>
-                    <a:pt x="4870331" y="2774196"/>
-                  </a:lnTo>
-                  <a:lnTo>
-                    <a:pt x="4941954" y="2778620"/>
-                  </a:lnTo>
-                  <a:lnTo>
-                    <a:pt x="5013576" y="2783017"/>
-                  </a:lnTo>
-                  <a:lnTo>
-                    <a:pt x="5085199" y="2787386"/>
-                  </a:lnTo>
-                  <a:lnTo>
-                    <a:pt x="5156821" y="2791728"/>
-                  </a:lnTo>
-                  <a:lnTo>
-                    <a:pt x="5228444" y="2796043"/>
-                  </a:lnTo>
-                  <a:lnTo>
-                    <a:pt x="5300066" y="2800331"/>
-                  </a:lnTo>
-                  <a:lnTo>
-                    <a:pt x="5371689" y="2804592"/>
-                  </a:lnTo>
-                  <a:lnTo>
-                    <a:pt x="5443311" y="2808827"/>
-                  </a:lnTo>
-                  <a:lnTo>
-                    <a:pt x="5514934" y="2813035"/>
-                  </a:lnTo>
-                  <a:lnTo>
-                    <a:pt x="5586557" y="2817218"/>
-                  </a:lnTo>
-                  <a:lnTo>
-                    <a:pt x="5658179" y="2821374"/>
-                  </a:lnTo>
-                  <a:lnTo>
-                    <a:pt x="5729802" y="2825504"/>
-                  </a:lnTo>
-                  <a:lnTo>
-                    <a:pt x="5801424" y="2829608"/>
-                  </a:lnTo>
-                  <a:lnTo>
-                    <a:pt x="5873047" y="2833687"/>
-                  </a:lnTo>
-                  <a:lnTo>
-                    <a:pt x="5944669" y="2837740"/>
-                  </a:lnTo>
-                  <a:lnTo>
-                    <a:pt x="6016292" y="2841768"/>
-                  </a:lnTo>
-                  <a:lnTo>
-                    <a:pt x="6087914" y="2845771"/>
-                  </a:lnTo>
-                  <a:lnTo>
-                    <a:pt x="6159537" y="2849749"/>
-                  </a:lnTo>
-                  <a:lnTo>
-                    <a:pt x="6231159" y="2853702"/>
-                  </a:lnTo>
-                  <a:lnTo>
-                    <a:pt x="6302782" y="2857631"/>
-                  </a:lnTo>
-                  <a:lnTo>
-                    <a:pt x="6374404" y="2861535"/>
-                  </a:lnTo>
-                  <a:lnTo>
-                    <a:pt x="6446027" y="2865414"/>
-                  </a:lnTo>
-                  <a:lnTo>
-                    <a:pt x="6517649" y="2869270"/>
-                  </a:lnTo>
-                  <a:lnTo>
-                    <a:pt x="6589272" y="2873101"/>
-                  </a:lnTo>
-                  <a:lnTo>
-                    <a:pt x="6660894" y="2876909"/>
-                  </a:lnTo>
-                  <a:lnTo>
-                    <a:pt x="6732517" y="2880693"/>
-                  </a:lnTo>
-                  <a:lnTo>
-                    <a:pt x="6804139" y="2884453"/>
-                  </a:lnTo>
-                  <a:lnTo>
-                    <a:pt x="6875762" y="2888190"/>
-                  </a:lnTo>
-                  <a:lnTo>
-                    <a:pt x="6947385" y="2891903"/>
-                  </a:lnTo>
-                  <a:lnTo>
-                    <a:pt x="7019007" y="2895593"/>
-                  </a:lnTo>
-                  <a:lnTo>
-                    <a:pt x="7090630" y="2899261"/>
-                  </a:lnTo>
-                  <a:lnTo>
-                    <a:pt x="7090630" y="3363035"/>
-                  </a:lnTo>
-                  <a:lnTo>
-                    <a:pt x="7019007" y="3358805"/>
-                  </a:lnTo>
-                  <a:lnTo>
-                    <a:pt x="6947385" y="3354427"/>
-                  </a:lnTo>
-                  <a:lnTo>
-                    <a:pt x="6875762" y="3349896"/>
-                  </a:lnTo>
-                  <a:lnTo>
-                    <a:pt x="6804139" y="3345206"/>
-                  </a:lnTo>
-                  <a:lnTo>
-                    <a:pt x="6732517" y="3340352"/>
-                  </a:lnTo>
-                  <a:lnTo>
-                    <a:pt x="6660894" y="3335327"/>
-                  </a:lnTo>
-                  <a:lnTo>
-                    <a:pt x="6589272" y="3330127"/>
-                  </a:lnTo>
-                  <a:lnTo>
-                    <a:pt x="6517649" y="3324744"/>
-                  </a:lnTo>
-                  <a:lnTo>
-                    <a:pt x="6446027" y="3319173"/>
-                  </a:lnTo>
-                  <a:lnTo>
-                    <a:pt x="6374404" y="3313406"/>
-                  </a:lnTo>
-                  <a:lnTo>
-                    <a:pt x="6302782" y="3307438"/>
-                  </a:lnTo>
-                  <a:lnTo>
-                    <a:pt x="6231159" y="3301260"/>
-                  </a:lnTo>
-                  <a:lnTo>
-                    <a:pt x="6159537" y="3294866"/>
-                  </a:lnTo>
-                  <a:lnTo>
-                    <a:pt x="6087914" y="3288248"/>
-                  </a:lnTo>
-                  <a:lnTo>
-                    <a:pt x="6016292" y="3281398"/>
-                  </a:lnTo>
-                  <a:lnTo>
-                    <a:pt x="5944669" y="3274307"/>
-                  </a:lnTo>
-                  <a:lnTo>
-                    <a:pt x="5873047" y="3266969"/>
-                  </a:lnTo>
-                  <a:lnTo>
-                    <a:pt x="5801424" y="3259373"/>
-                  </a:lnTo>
-                  <a:lnTo>
-                    <a:pt x="5729802" y="3251511"/>
-                  </a:lnTo>
-                  <a:lnTo>
-                    <a:pt x="5658179" y="3243374"/>
-                  </a:lnTo>
-                  <a:lnTo>
-                    <a:pt x="5586557" y="3234951"/>
-                  </a:lnTo>
-                  <a:lnTo>
-                    <a:pt x="5514934" y="3226234"/>
-                  </a:lnTo>
-                  <a:lnTo>
-                    <a:pt x="5443311" y="3217211"/>
-                  </a:lnTo>
-                  <a:lnTo>
-                    <a:pt x="5371689" y="3207871"/>
-                  </a:lnTo>
-                  <a:lnTo>
-                    <a:pt x="5300066" y="3198205"/>
-                  </a:lnTo>
-                  <a:lnTo>
-                    <a:pt x="5228444" y="3188200"/>
-                  </a:lnTo>
-                  <a:lnTo>
-                    <a:pt x="5156821" y="3177844"/>
-                  </a:lnTo>
-                  <a:lnTo>
-                    <a:pt x="5085199" y="3167126"/>
-                  </a:lnTo>
-                  <a:lnTo>
-                    <a:pt x="5013576" y="3156031"/>
-                  </a:lnTo>
-                  <a:lnTo>
-                    <a:pt x="4941954" y="3144548"/>
-                  </a:lnTo>
-                  <a:lnTo>
-                    <a:pt x="4870331" y="3132663"/>
-                  </a:lnTo>
-                  <a:lnTo>
-                    <a:pt x="4798709" y="3120361"/>
-                  </a:lnTo>
-                  <a:lnTo>
-                    <a:pt x="4727086" y="3107629"/>
-                  </a:lnTo>
-                  <a:lnTo>
-                    <a:pt x="4655464" y="3094450"/>
-                  </a:lnTo>
-                  <a:lnTo>
-                    <a:pt x="4583841" y="3080809"/>
-                  </a:lnTo>
-                  <a:lnTo>
-                    <a:pt x="4512219" y="3066691"/>
-                  </a:lnTo>
-                  <a:lnTo>
-                    <a:pt x="4440596" y="3052077"/>
-                  </a:lnTo>
-                  <a:lnTo>
-                    <a:pt x="4368974" y="3036952"/>
-                  </a:lnTo>
-                  <a:lnTo>
-                    <a:pt x="4297351" y="3021297"/>
-                  </a:lnTo>
-                  <a:lnTo>
-                    <a:pt x="4225729" y="3005093"/>
-                  </a:lnTo>
-                  <a:lnTo>
-                    <a:pt x="4154106" y="2988321"/>
-                  </a:lnTo>
-                  <a:lnTo>
-                    <a:pt x="4082483" y="2970962"/>
-                  </a:lnTo>
-                  <a:lnTo>
-                    <a:pt x="4010861" y="2952994"/>
-                  </a:lnTo>
-                  <a:lnTo>
-                    <a:pt x="3939238" y="2934397"/>
-                  </a:lnTo>
-                  <a:lnTo>
-                    <a:pt x="3867616" y="2915148"/>
-                  </a:lnTo>
-                  <a:lnTo>
-                    <a:pt x="3795993" y="2895225"/>
-                  </a:lnTo>
-                  <a:lnTo>
-                    <a:pt x="3724371" y="2874603"/>
-                  </a:lnTo>
-                  <a:lnTo>
-                    <a:pt x="3652748" y="2853259"/>
-                  </a:lnTo>
-                  <a:lnTo>
-                    <a:pt x="3581126" y="2831168"/>
-                  </a:lnTo>
-                  <a:lnTo>
-                    <a:pt x="3509503" y="2808302"/>
-                  </a:lnTo>
-                  <a:lnTo>
-                    <a:pt x="3437881" y="2784635"/>
-                  </a:lnTo>
-                  <a:lnTo>
-                    <a:pt x="3366258" y="2760138"/>
-                  </a:lnTo>
-                  <a:lnTo>
-                    <a:pt x="3294636" y="2734784"/>
-                  </a:lnTo>
-                  <a:lnTo>
-                    <a:pt x="3223013" y="2708541"/>
-                  </a:lnTo>
-                  <a:lnTo>
-                    <a:pt x="3151391" y="2681378"/>
-                  </a:lnTo>
-                  <a:lnTo>
-                    <a:pt x="3079768" y="2654098"/>
-                  </a:lnTo>
-                  <a:lnTo>
-                    <a:pt x="3008146" y="2648892"/>
-                  </a:lnTo>
-                  <a:lnTo>
-                    <a:pt x="2936523" y="2643654"/>
-                  </a:lnTo>
-                  <a:lnTo>
-                    <a:pt x="2864901" y="2638383"/>
-                  </a:lnTo>
-                  <a:lnTo>
-                    <a:pt x="2793278" y="2633079"/>
-                  </a:lnTo>
-                  <a:lnTo>
-                    <a:pt x="2721655" y="2627741"/>
-                  </a:lnTo>
-                  <a:lnTo>
-                    <a:pt x="2650033" y="2622370"/>
-                  </a:lnTo>
-                  <a:lnTo>
-                    <a:pt x="2578410" y="2616966"/>
-                  </a:lnTo>
-                  <a:lnTo>
-                    <a:pt x="2506788" y="2611527"/>
-                  </a:lnTo>
-                  <a:lnTo>
-                    <a:pt x="2435165" y="2606055"/>
-                  </a:lnTo>
-                  <a:lnTo>
-                    <a:pt x="2363543" y="2600547"/>
-                  </a:lnTo>
-                  <a:lnTo>
-                    <a:pt x="2291920" y="2595006"/>
-                  </a:lnTo>
-                  <a:lnTo>
-                    <a:pt x="2220298" y="2589430"/>
-                  </a:lnTo>
-                  <a:lnTo>
-                    <a:pt x="2148675" y="2583818"/>
-                  </a:lnTo>
-                  <a:lnTo>
-                    <a:pt x="2077053" y="2578172"/>
-                  </a:lnTo>
-                  <a:lnTo>
-                    <a:pt x="2005430" y="2572490"/>
-                  </a:lnTo>
-                  <a:lnTo>
-                    <a:pt x="1933808" y="2566772"/>
-                  </a:lnTo>
-                  <a:lnTo>
-                    <a:pt x="1862185" y="2561019"/>
-                  </a:lnTo>
-                  <a:lnTo>
-                    <a:pt x="1790563" y="2555229"/>
-                  </a:lnTo>
-                  <a:lnTo>
-                    <a:pt x="1718940" y="2549403"/>
-                  </a:lnTo>
-                  <a:lnTo>
-                    <a:pt x="1647318" y="2543541"/>
-                  </a:lnTo>
-                  <a:lnTo>
-                    <a:pt x="1575695" y="2537641"/>
-                  </a:lnTo>
-                  <a:lnTo>
-                    <a:pt x="1504073" y="2531705"/>
-                  </a:lnTo>
-                  <a:lnTo>
-                    <a:pt x="1432450" y="2525732"/>
-                  </a:lnTo>
-                  <a:lnTo>
-                    <a:pt x="1360827" y="2519721"/>
-                  </a:lnTo>
-                  <a:lnTo>
-                    <a:pt x="1289205" y="2513672"/>
-                  </a:lnTo>
-                  <a:lnTo>
-                    <a:pt x="1217582" y="2507585"/>
-                  </a:lnTo>
-                  <a:lnTo>
-                    <a:pt x="1145960" y="2501460"/>
-                  </a:lnTo>
-                  <a:lnTo>
-                    <a:pt x="1074337" y="2495297"/>
-                  </a:lnTo>
-                  <a:lnTo>
-                    <a:pt x="1002715" y="2489095"/>
-                  </a:lnTo>
-                  <a:lnTo>
-                    <a:pt x="931092" y="2482854"/>
-                  </a:lnTo>
-                  <a:lnTo>
-                    <a:pt x="859470" y="2476574"/>
-                  </a:lnTo>
-                  <a:lnTo>
-                    <a:pt x="787847" y="2470255"/>
-                  </a:lnTo>
-                  <a:lnTo>
-                    <a:pt x="716225" y="2463896"/>
-                  </a:lnTo>
-                  <a:lnTo>
-                    <a:pt x="644602" y="2457497"/>
-                  </a:lnTo>
-                  <a:lnTo>
-                    <a:pt x="572980" y="2451058"/>
-                  </a:lnTo>
-                  <a:lnTo>
-                    <a:pt x="501357" y="2444578"/>
-                  </a:lnTo>
-                  <a:lnTo>
-                    <a:pt x="429735" y="2438058"/>
-                  </a:lnTo>
-                  <a:lnTo>
-                    <a:pt x="358112" y="2431497"/>
-                  </a:lnTo>
-                  <a:lnTo>
-                    <a:pt x="286490" y="2424895"/>
-                  </a:lnTo>
-                  <a:lnTo>
-                    <a:pt x="214867" y="2418251"/>
-                  </a:lnTo>
-                  <a:lnTo>
-                    <a:pt x="143245" y="2411566"/>
-                  </a:lnTo>
-                  <a:lnTo>
-                    <a:pt x="71622" y="2404838"/>
-                  </a:lnTo>
-                  <a:lnTo>
-                    <a:pt x="0" y="2398069"/>
+                    <a:pt x="143245" y="66385"/>
+                  </a:lnTo>
+                  <a:lnTo>
+                    <a:pt x="214867" y="181346"/>
+                  </a:lnTo>
+                  <a:lnTo>
+                    <a:pt x="286490" y="292441"/>
+                  </a:lnTo>
+                  <a:lnTo>
+                    <a:pt x="358112" y="399797"/>
+                  </a:lnTo>
+                  <a:lnTo>
+                    <a:pt x="429735" y="503543"/>
+                  </a:lnTo>
+                  <a:lnTo>
+                    <a:pt x="501357" y="603798"/>
+                  </a:lnTo>
+                  <a:lnTo>
+                    <a:pt x="572980" y="700681"/>
+                  </a:lnTo>
+                  <a:lnTo>
+                    <a:pt x="644602" y="794304"/>
+                  </a:lnTo>
+                  <a:lnTo>
+                    <a:pt x="716225" y="884778"/>
+                  </a:lnTo>
+                  <a:lnTo>
+                    <a:pt x="787847" y="972209"/>
+                  </a:lnTo>
+                  <a:lnTo>
+                    <a:pt x="859470" y="1056698"/>
+                  </a:lnTo>
+                  <a:lnTo>
+                    <a:pt x="931092" y="1138345"/>
+                  </a:lnTo>
+                  <a:lnTo>
+                    <a:pt x="1002715" y="1217245"/>
+                  </a:lnTo>
+                  <a:lnTo>
+                    <a:pt x="1074337" y="1293491"/>
+                  </a:lnTo>
+                  <a:lnTo>
+                    <a:pt x="1145960" y="1367172"/>
+                  </a:lnTo>
+                  <a:lnTo>
+                    <a:pt x="1217582" y="1438375"/>
+                  </a:lnTo>
+                  <a:lnTo>
+                    <a:pt x="1289205" y="1507182"/>
+                  </a:lnTo>
+                  <a:lnTo>
+                    <a:pt x="1360827" y="1573674"/>
+                  </a:lnTo>
+                  <a:lnTo>
+                    <a:pt x="1432450" y="1637930"/>
+                  </a:lnTo>
+                  <a:lnTo>
+                    <a:pt x="1504073" y="1700024"/>
+                  </a:lnTo>
+                  <a:lnTo>
+                    <a:pt x="1575695" y="1760029"/>
+                  </a:lnTo>
+                  <a:lnTo>
+                    <a:pt x="1647318" y="1818016"/>
+                  </a:lnTo>
+                  <a:lnTo>
+                    <a:pt x="1718940" y="1874052"/>
+                  </a:lnTo>
+                  <a:lnTo>
+                    <a:pt x="1790563" y="1928202"/>
+                  </a:lnTo>
+                  <a:lnTo>
+                    <a:pt x="1862185" y="1980532"/>
+                  </a:lnTo>
+                  <a:lnTo>
+                    <a:pt x="1933808" y="2031100"/>
+                  </a:lnTo>
+                  <a:lnTo>
+                    <a:pt x="2005430" y="2079968"/>
+                  </a:lnTo>
+                  <a:lnTo>
+                    <a:pt x="2077053" y="2127192"/>
+                  </a:lnTo>
+                  <a:lnTo>
+                    <a:pt x="2148675" y="2172827"/>
+                  </a:lnTo>
+                  <a:lnTo>
+                    <a:pt x="2220298" y="2216927"/>
+                  </a:lnTo>
+                  <a:lnTo>
+                    <a:pt x="2291920" y="2259543"/>
+                  </a:lnTo>
+                  <a:lnTo>
+                    <a:pt x="2363543" y="2300726"/>
+                  </a:lnTo>
+                  <a:lnTo>
+                    <a:pt x="2435165" y="2340523"/>
+                  </a:lnTo>
+                  <a:lnTo>
+                    <a:pt x="2506788" y="2378982"/>
+                  </a:lnTo>
+                  <a:lnTo>
+                    <a:pt x="2578410" y="2416146"/>
+                  </a:lnTo>
+                  <a:lnTo>
+                    <a:pt x="2650033" y="2452061"/>
+                  </a:lnTo>
+                  <a:lnTo>
+                    <a:pt x="2721655" y="2486767"/>
+                  </a:lnTo>
+                  <a:lnTo>
+                    <a:pt x="2793278" y="2520306"/>
+                  </a:lnTo>
+                  <a:lnTo>
+                    <a:pt x="2864901" y="2552717"/>
+                  </a:lnTo>
+                  <a:lnTo>
+                    <a:pt x="2936523" y="2584037"/>
+                  </a:lnTo>
+                  <a:lnTo>
+                    <a:pt x="3008146" y="2614303"/>
+                  </a:lnTo>
+                  <a:lnTo>
+                    <a:pt x="3079768" y="2643552"/>
+                  </a:lnTo>
+                  <a:lnTo>
+                    <a:pt x="3151391" y="2657408"/>
+                  </a:lnTo>
+                  <a:lnTo>
+                    <a:pt x="3223013" y="2662390"/>
+                  </a:lnTo>
+                  <a:lnTo>
+                    <a:pt x="3294636" y="2667341"/>
+                  </a:lnTo>
+                  <a:lnTo>
+                    <a:pt x="3366258" y="2672263"/>
+                  </a:lnTo>
+                  <a:lnTo>
+                    <a:pt x="3437881" y="2677155"/>
+                  </a:lnTo>
+                  <a:lnTo>
+                    <a:pt x="3509503" y="2682017"/>
+                  </a:lnTo>
+                  <a:lnTo>
+                    <a:pt x="3581126" y="2686850"/>
+                  </a:lnTo>
+                  <a:lnTo>
+                    <a:pt x="3652748" y="2691654"/>
+                  </a:lnTo>
+                  <a:lnTo>
+                    <a:pt x="3724371" y="2696429"/>
+                  </a:lnTo>
+                  <a:lnTo>
+                    <a:pt x="3795993" y="2701176"/>
+                  </a:lnTo>
+                  <a:lnTo>
+                    <a:pt x="3867616" y="2705893"/>
+                  </a:lnTo>
+                  <a:lnTo>
+                    <a:pt x="3939238" y="2710582"/>
+                  </a:lnTo>
+                  <a:lnTo>
+                    <a:pt x="4010861" y="2715243"/>
+                  </a:lnTo>
+                  <a:lnTo>
+                    <a:pt x="4082483" y="2719876"/>
+                  </a:lnTo>
+                  <a:lnTo>
+                    <a:pt x="4154106" y="2724481"/>
+                  </a:lnTo>
+                  <a:lnTo>
+                    <a:pt x="4225729" y="2729058"/>
+                  </a:lnTo>
+                  <a:lnTo>
+                    <a:pt x="4297351" y="2733608"/>
+                  </a:lnTo>
+                  <a:lnTo>
+                    <a:pt x="4368974" y="2738130"/>
+                  </a:lnTo>
+                  <a:lnTo>
+                    <a:pt x="4440596" y="2742625"/>
+                  </a:lnTo>
+                  <a:lnTo>
+                    <a:pt x="4512219" y="2747092"/>
+                  </a:lnTo>
+                  <a:lnTo>
+                    <a:pt x="4583841" y="2751533"/>
+                  </a:lnTo>
+                  <a:lnTo>
+                    <a:pt x="4655464" y="2755947"/>
+                  </a:lnTo>
+                  <a:lnTo>
+                    <a:pt x="4727086" y="2760335"/>
+                  </a:lnTo>
+                  <a:lnTo>
+                    <a:pt x="4798709" y="2764696"/>
+                  </a:lnTo>
+                  <a:lnTo>
+                    <a:pt x="4870331" y="2769030"/>
+                  </a:lnTo>
+                  <a:lnTo>
+                    <a:pt x="4941954" y="2773339"/>
+                  </a:lnTo>
+                  <a:lnTo>
+                    <a:pt x="5013576" y="2777622"/>
+                  </a:lnTo>
+                  <a:lnTo>
+                    <a:pt x="5085199" y="2781878"/>
+                  </a:lnTo>
+                  <a:lnTo>
+                    <a:pt x="5156821" y="2786110"/>
+                  </a:lnTo>
+                  <a:lnTo>
+                    <a:pt x="5228444" y="2790315"/>
+                  </a:lnTo>
+                  <a:lnTo>
+                    <a:pt x="5300066" y="2794495"/>
+                  </a:lnTo>
+                  <a:lnTo>
+                    <a:pt x="5371689" y="2798650"/>
+                  </a:lnTo>
+                  <a:lnTo>
+                    <a:pt x="5443311" y="2802781"/>
+                  </a:lnTo>
+                  <a:lnTo>
+                    <a:pt x="5514934" y="2806886"/>
+                  </a:lnTo>
+                  <a:lnTo>
+                    <a:pt x="5586557" y="2810966"/>
+                  </a:lnTo>
+                  <a:lnTo>
+                    <a:pt x="5658179" y="2815022"/>
+                  </a:lnTo>
+                  <a:lnTo>
+                    <a:pt x="5729802" y="2819053"/>
+                  </a:lnTo>
+                  <a:lnTo>
+                    <a:pt x="5801424" y="2823060"/>
+                  </a:lnTo>
+                  <a:lnTo>
+                    <a:pt x="5873047" y="2827043"/>
+                  </a:lnTo>
+                  <a:lnTo>
+                    <a:pt x="5944669" y="2831002"/>
+                  </a:lnTo>
+                  <a:lnTo>
+                    <a:pt x="6016292" y="2834937"/>
+                  </a:lnTo>
+                  <a:lnTo>
+                    <a:pt x="6087914" y="2838848"/>
+                  </a:lnTo>
+                  <a:lnTo>
+                    <a:pt x="6159537" y="2842736"/>
+                  </a:lnTo>
+                  <a:lnTo>
+                    <a:pt x="6231159" y="2846600"/>
+                  </a:lnTo>
+                  <a:lnTo>
+                    <a:pt x="6302782" y="2850441"/>
+                  </a:lnTo>
+                  <a:lnTo>
+                    <a:pt x="6374404" y="2854259"/>
+                  </a:lnTo>
+                  <a:lnTo>
+                    <a:pt x="6446027" y="2858054"/>
+                  </a:lnTo>
+                  <a:lnTo>
+                    <a:pt x="6517649" y="2861825"/>
+                  </a:lnTo>
+                  <a:lnTo>
+                    <a:pt x="6589272" y="2865575"/>
+                  </a:lnTo>
+                  <a:lnTo>
+                    <a:pt x="6660894" y="2869301"/>
+                  </a:lnTo>
+                  <a:lnTo>
+                    <a:pt x="6732517" y="2873005"/>
+                  </a:lnTo>
+                  <a:lnTo>
+                    <a:pt x="6804139" y="2876687"/>
+                  </a:lnTo>
+                  <a:lnTo>
+                    <a:pt x="6875762" y="2880347"/>
+                  </a:lnTo>
+                  <a:lnTo>
+                    <a:pt x="6947385" y="2883984"/>
+                  </a:lnTo>
+                  <a:lnTo>
+                    <a:pt x="7019007" y="2887600"/>
+                  </a:lnTo>
+                  <a:lnTo>
+                    <a:pt x="7090630" y="2891194"/>
+                  </a:lnTo>
+                  <a:lnTo>
+                    <a:pt x="7090630" y="3360109"/>
+                  </a:lnTo>
+                  <a:lnTo>
+                    <a:pt x="7019007" y="3355805"/>
+                  </a:lnTo>
+                  <a:lnTo>
+                    <a:pt x="6947385" y="3351351"/>
+                  </a:lnTo>
+                  <a:lnTo>
+                    <a:pt x="6875762" y="3346742"/>
+                  </a:lnTo>
+                  <a:lnTo>
+                    <a:pt x="6804139" y="3341973"/>
+                  </a:lnTo>
+                  <a:lnTo>
+                    <a:pt x="6732517" y="3337038"/>
+                  </a:lnTo>
+                  <a:lnTo>
+                    <a:pt x="6660894" y="3331930"/>
+                  </a:lnTo>
+                  <a:lnTo>
+                    <a:pt x="6589272" y="3326645"/>
+                  </a:lnTo>
+                  <a:lnTo>
+                    <a:pt x="6517649" y="3321177"/>
+                  </a:lnTo>
+                  <a:lnTo>
+                    <a:pt x="6446027" y="3315517"/>
+                  </a:lnTo>
+                  <a:lnTo>
+                    <a:pt x="6374404" y="3309661"/>
+                  </a:lnTo>
+                  <a:lnTo>
+                    <a:pt x="6302782" y="3303601"/>
+                  </a:lnTo>
+                  <a:lnTo>
+                    <a:pt x="6231159" y="3297330"/>
+                  </a:lnTo>
+                  <a:lnTo>
+                    <a:pt x="6159537" y="3290840"/>
+                  </a:lnTo>
+                  <a:lnTo>
+                    <a:pt x="6087914" y="3284125"/>
+                  </a:lnTo>
+                  <a:lnTo>
+                    <a:pt x="6016292" y="3277176"/>
+                  </a:lnTo>
+                  <a:lnTo>
+                    <a:pt x="5944669" y="3269985"/>
+                  </a:lnTo>
+                  <a:lnTo>
+                    <a:pt x="5873047" y="3262543"/>
+                  </a:lnTo>
+                  <a:lnTo>
+                    <a:pt x="5801424" y="3254843"/>
+                  </a:lnTo>
+                  <a:lnTo>
+                    <a:pt x="5729802" y="3246874"/>
+                  </a:lnTo>
+                  <a:lnTo>
+                    <a:pt x="5658179" y="3238628"/>
+                  </a:lnTo>
+                  <a:lnTo>
+                    <a:pt x="5586557" y="3230096"/>
+                  </a:lnTo>
+                  <a:lnTo>
+                    <a:pt x="5514934" y="3221266"/>
+                  </a:lnTo>
+                  <a:lnTo>
+                    <a:pt x="5443311" y="3212128"/>
+                  </a:lnTo>
+                  <a:lnTo>
+                    <a:pt x="5371689" y="3202673"/>
+                  </a:lnTo>
+                  <a:lnTo>
+                    <a:pt x="5300066" y="3192888"/>
+                  </a:lnTo>
+                  <a:lnTo>
+                    <a:pt x="5228444" y="3182763"/>
+                  </a:lnTo>
+                  <a:lnTo>
+                    <a:pt x="5156821" y="3172285"/>
+                  </a:lnTo>
+                  <a:lnTo>
+                    <a:pt x="5085199" y="3161443"/>
+                  </a:lnTo>
+                  <a:lnTo>
+                    <a:pt x="5013576" y="3150223"/>
+                  </a:lnTo>
+                  <a:lnTo>
+                    <a:pt x="4941954" y="3138613"/>
+                  </a:lnTo>
+                  <a:lnTo>
+                    <a:pt x="4870331" y="3126598"/>
+                  </a:lnTo>
+                  <a:lnTo>
+                    <a:pt x="4798709" y="3114165"/>
+                  </a:lnTo>
+                  <a:lnTo>
+                    <a:pt x="4727086" y="3101299"/>
+                  </a:lnTo>
+                  <a:lnTo>
+                    <a:pt x="4655464" y="3087986"/>
+                  </a:lnTo>
+                  <a:lnTo>
+                    <a:pt x="4583841" y="3074209"/>
+                  </a:lnTo>
+                  <a:lnTo>
+                    <a:pt x="4512219" y="3059952"/>
+                  </a:lnTo>
+                  <a:lnTo>
+                    <a:pt x="4440596" y="3045199"/>
+                  </a:lnTo>
+                  <a:lnTo>
+                    <a:pt x="4368974" y="3029933"/>
+                  </a:lnTo>
+                  <a:lnTo>
+                    <a:pt x="4297351" y="3014135"/>
+                  </a:lnTo>
+                  <a:lnTo>
+                    <a:pt x="4225729" y="2997787"/>
+                  </a:lnTo>
+                  <a:lnTo>
+                    <a:pt x="4154106" y="2980870"/>
+                  </a:lnTo>
+                  <a:lnTo>
+                    <a:pt x="4082483" y="2963364"/>
+                  </a:lnTo>
+                  <a:lnTo>
+                    <a:pt x="4010861" y="2945249"/>
+                  </a:lnTo>
+                  <a:lnTo>
+                    <a:pt x="3939238" y="2926503"/>
+                  </a:lnTo>
+                  <a:lnTo>
+                    <a:pt x="3867616" y="2907105"/>
+                  </a:lnTo>
+                  <a:lnTo>
+                    <a:pt x="3795993" y="2887031"/>
+                  </a:lnTo>
+                  <a:lnTo>
+                    <a:pt x="3724371" y="2866258"/>
+                  </a:lnTo>
+                  <a:lnTo>
+                    <a:pt x="3652748" y="2844763"/>
+                  </a:lnTo>
+                  <a:lnTo>
+                    <a:pt x="3581126" y="2822519"/>
+                  </a:lnTo>
+                  <a:lnTo>
+                    <a:pt x="3509503" y="2799500"/>
+                  </a:lnTo>
+                  <a:lnTo>
+                    <a:pt x="3437881" y="2775681"/>
+                  </a:lnTo>
+                  <a:lnTo>
+                    <a:pt x="3366258" y="2751032"/>
+                  </a:lnTo>
+                  <a:lnTo>
+                    <a:pt x="3294636" y="2725525"/>
+                  </a:lnTo>
+                  <a:lnTo>
+                    <a:pt x="3223013" y="2699130"/>
+                  </a:lnTo>
+                  <a:lnTo>
+                    <a:pt x="3151391" y="2671816"/>
+                  </a:lnTo>
+                  <a:lnTo>
+                    <a:pt x="3079768" y="2652397"/>
+                  </a:lnTo>
+                  <a:lnTo>
+                    <a:pt x="3008146" y="2647355"/>
+                  </a:lnTo>
+                  <a:lnTo>
+                    <a:pt x="2936523" y="2642282"/>
+                  </a:lnTo>
+                  <a:lnTo>
+                    <a:pt x="2864901" y="2637179"/>
+                  </a:lnTo>
+                  <a:lnTo>
+                    <a:pt x="2793278" y="2632044"/>
+                  </a:lnTo>
+                  <a:lnTo>
+                    <a:pt x="2721655" y="2626879"/>
+                  </a:lnTo>
+                  <a:lnTo>
+                    <a:pt x="2650033" y="2621682"/>
+                  </a:lnTo>
+                  <a:lnTo>
+                    <a:pt x="2578410" y="2616453"/>
+                  </a:lnTo>
+                  <a:lnTo>
+                    <a:pt x="2506788" y="2611193"/>
+                  </a:lnTo>
+                  <a:lnTo>
+                    <a:pt x="2435165" y="2605901"/>
+                  </a:lnTo>
+                  <a:lnTo>
+                    <a:pt x="2363543" y="2600577"/>
+                  </a:lnTo>
+                  <a:lnTo>
+                    <a:pt x="2291920" y="2595221"/>
+                  </a:lnTo>
+                  <a:lnTo>
+                    <a:pt x="2220298" y="2589832"/>
+                  </a:lnTo>
+                  <a:lnTo>
+                    <a:pt x="2148675" y="2584411"/>
+                  </a:lnTo>
+                  <a:lnTo>
+                    <a:pt x="2077053" y="2578956"/>
+                  </a:lnTo>
+                  <a:lnTo>
+                    <a:pt x="2005430" y="2573469"/>
+                  </a:lnTo>
+                  <a:lnTo>
+                    <a:pt x="1933808" y="2567948"/>
+                  </a:lnTo>
+                  <a:lnTo>
+                    <a:pt x="1862185" y="2562394"/>
+                  </a:lnTo>
+                  <a:lnTo>
+                    <a:pt x="1790563" y="2556806"/>
+                  </a:lnTo>
+                  <a:lnTo>
+                    <a:pt x="1718940" y="2551184"/>
+                  </a:lnTo>
+                  <a:lnTo>
+                    <a:pt x="1647318" y="2545528"/>
+                  </a:lnTo>
+                  <a:lnTo>
+                    <a:pt x="1575695" y="2539838"/>
+                  </a:lnTo>
+                  <a:lnTo>
+                    <a:pt x="1504073" y="2534113"/>
+                  </a:lnTo>
+                  <a:lnTo>
+                    <a:pt x="1432450" y="2528353"/>
+                  </a:lnTo>
+                  <a:lnTo>
+                    <a:pt x="1360827" y="2522559"/>
+                  </a:lnTo>
+                  <a:lnTo>
+                    <a:pt x="1289205" y="2516730"/>
+                  </a:lnTo>
+                  <a:lnTo>
+                    <a:pt x="1217582" y="2510865"/>
+                  </a:lnTo>
+                  <a:lnTo>
+                    <a:pt x="1145960" y="2504964"/>
+                  </a:lnTo>
+                  <a:lnTo>
+                    <a:pt x="1074337" y="2499028"/>
+                  </a:lnTo>
+                  <a:lnTo>
+                    <a:pt x="1002715" y="2493056"/>
+                  </a:lnTo>
+                  <a:lnTo>
+                    <a:pt x="931092" y="2487047"/>
+                  </a:lnTo>
+                  <a:lnTo>
+                    <a:pt x="859470" y="2481002"/>
+                  </a:lnTo>
+                  <a:lnTo>
+                    <a:pt x="787847" y="2474921"/>
+                  </a:lnTo>
+                  <a:lnTo>
+                    <a:pt x="716225" y="2468802"/>
+                  </a:lnTo>
+                  <a:lnTo>
+                    <a:pt x="644602" y="2462647"/>
+                  </a:lnTo>
+                  <a:lnTo>
+                    <a:pt x="572980" y="2456454"/>
+                  </a:lnTo>
+                  <a:lnTo>
+                    <a:pt x="501357" y="2450223"/>
+                  </a:lnTo>
+                  <a:lnTo>
+                    <a:pt x="429735" y="2443955"/>
+                  </a:lnTo>
+                  <a:lnTo>
+                    <a:pt x="358112" y="2437649"/>
+                  </a:lnTo>
+                  <a:lnTo>
+                    <a:pt x="286490" y="2431304"/>
+                  </a:lnTo>
+                  <a:lnTo>
+                    <a:pt x="214867" y="2424921"/>
+                  </a:lnTo>
+                  <a:lnTo>
+                    <a:pt x="143245" y="2418500"/>
+                  </a:lnTo>
+                  <a:lnTo>
+                    <a:pt x="71622" y="2412039"/>
+                  </a:lnTo>
+                  <a:lnTo>
+                    <a:pt x="0" y="2405539"/>
                   </a:lnTo>
                   <a:close/>
                 </a:path>
@@ -4017,309 +4017,309 @@
           </p:nvSpPr>
           <p:spPr>
             <a:xfrm>
-              <a:off x="1270155" y="2073503"/>
-              <a:ext cx="6992523" cy="2899261"/>
+              <a:off x="1275326" y="2073503"/>
+              <a:ext cx="6987352" cy="2891194"/>
             </a:xfrm>
             <a:custGeom>
               <a:avLst/>
               <a:pathLst>
-                <a:path w="6992523" h="2899261">
+                <a:path w="6987352" h="2891194">
                   <a:moveTo>
                     <a:pt x="0" y="0"/>
                   </a:moveTo>
                   <a:lnTo>
-                    <a:pt x="45138" y="75268"/>
-                  </a:lnTo>
-                  <a:lnTo>
-                    <a:pt x="116761" y="190655"/>
-                  </a:lnTo>
-                  <a:lnTo>
-                    <a:pt x="188383" y="302137"/>
-                  </a:lnTo>
-                  <a:lnTo>
-                    <a:pt x="260006" y="409844"/>
-                  </a:lnTo>
-                  <a:lnTo>
-                    <a:pt x="331628" y="513905"/>
-                  </a:lnTo>
-                  <a:lnTo>
-                    <a:pt x="403251" y="614443"/>
-                  </a:lnTo>
-                  <a:lnTo>
-                    <a:pt x="474873" y="711578"/>
-                  </a:lnTo>
-                  <a:lnTo>
-                    <a:pt x="546496" y="805425"/>
-                  </a:lnTo>
-                  <a:lnTo>
-                    <a:pt x="618118" y="896094"/>
-                  </a:lnTo>
-                  <a:lnTo>
-                    <a:pt x="689741" y="983694"/>
-                  </a:lnTo>
-                  <a:lnTo>
-                    <a:pt x="761363" y="1068328"/>
-                  </a:lnTo>
-                  <a:lnTo>
-                    <a:pt x="832986" y="1150098"/>
-                  </a:lnTo>
-                  <a:lnTo>
-                    <a:pt x="904608" y="1229099"/>
-                  </a:lnTo>
-                  <a:lnTo>
-                    <a:pt x="976231" y="1305426"/>
-                  </a:lnTo>
-                  <a:lnTo>
-                    <a:pt x="1047853" y="1379169"/>
-                  </a:lnTo>
-                  <a:lnTo>
-                    <a:pt x="1119476" y="1450415"/>
-                  </a:lnTo>
-                  <a:lnTo>
-                    <a:pt x="1191098" y="1519250"/>
-                  </a:lnTo>
-                  <a:lnTo>
-                    <a:pt x="1262721" y="1585754"/>
-                  </a:lnTo>
-                  <a:lnTo>
-                    <a:pt x="1334343" y="1650007"/>
-                  </a:lnTo>
-                  <a:lnTo>
-                    <a:pt x="1405966" y="1712084"/>
-                  </a:lnTo>
-                  <a:lnTo>
-                    <a:pt x="1477589" y="1772061"/>
-                  </a:lnTo>
-                  <a:lnTo>
-                    <a:pt x="1549211" y="1830006"/>
-                  </a:lnTo>
-                  <a:lnTo>
-                    <a:pt x="1620834" y="1885991"/>
-                  </a:lnTo>
-                  <a:lnTo>
-                    <a:pt x="1692456" y="1940080"/>
-                  </a:lnTo>
-                  <a:lnTo>
-                    <a:pt x="1764079" y="1992337"/>
-                  </a:lnTo>
-                  <a:lnTo>
-                    <a:pt x="1835701" y="2042826"/>
-                  </a:lnTo>
-                  <a:lnTo>
-                    <a:pt x="1907324" y="2091606"/>
-                  </a:lnTo>
-                  <a:lnTo>
-                    <a:pt x="1978946" y="2138734"/>
-                  </a:lnTo>
-                  <a:lnTo>
-                    <a:pt x="2050569" y="2184267"/>
-                  </a:lnTo>
-                  <a:lnTo>
-                    <a:pt x="2122191" y="2228258"/>
-                  </a:lnTo>
-                  <a:lnTo>
-                    <a:pt x="2193814" y="2270760"/>
-                  </a:lnTo>
-                  <a:lnTo>
-                    <a:pt x="2265436" y="2311824"/>
-                  </a:lnTo>
-                  <a:lnTo>
-                    <a:pt x="2337059" y="2351497"/>
-                  </a:lnTo>
-                  <a:lnTo>
-                    <a:pt x="2408681" y="2389827"/>
-                  </a:lnTo>
-                  <a:lnTo>
-                    <a:pt x="2480304" y="2426860"/>
-                  </a:lnTo>
-                  <a:lnTo>
-                    <a:pt x="2551926" y="2462638"/>
-                  </a:lnTo>
-                  <a:lnTo>
-                    <a:pt x="2623549" y="2497206"/>
-                  </a:lnTo>
-                  <a:lnTo>
-                    <a:pt x="2695171" y="2530604"/>
-                  </a:lnTo>
-                  <a:lnTo>
-                    <a:pt x="2766794" y="2562870"/>
-                  </a:lnTo>
-                  <a:lnTo>
-                    <a:pt x="2838417" y="2594045"/>
-                  </a:lnTo>
-                  <a:lnTo>
-                    <a:pt x="2910039" y="2624164"/>
-                  </a:lnTo>
-                  <a:lnTo>
-                    <a:pt x="2981662" y="2653263"/>
-                  </a:lnTo>
-                  <a:lnTo>
-                    <a:pt x="3053284" y="2659271"/>
-                  </a:lnTo>
-                  <a:lnTo>
-                    <a:pt x="3124907" y="2664412"/>
-                  </a:lnTo>
-                  <a:lnTo>
-                    <a:pt x="3196529" y="2669521"/>
-                  </a:lnTo>
-                  <a:lnTo>
-                    <a:pt x="3268152" y="2674598"/>
-                  </a:lnTo>
-                  <a:lnTo>
-                    <a:pt x="3339774" y="2679643"/>
-                  </a:lnTo>
-                  <a:lnTo>
-                    <a:pt x="3411397" y="2684657"/>
-                  </a:lnTo>
-                  <a:lnTo>
-                    <a:pt x="3483019" y="2689639"/>
-                  </a:lnTo>
-                  <a:lnTo>
-                    <a:pt x="3554642" y="2694591"/>
-                  </a:lnTo>
-                  <a:lnTo>
-                    <a:pt x="3626264" y="2699511"/>
-                  </a:lnTo>
-                  <a:lnTo>
-                    <a:pt x="3697887" y="2704401"/>
-                  </a:lnTo>
-                  <a:lnTo>
-                    <a:pt x="3769509" y="2709261"/>
-                  </a:lnTo>
-                  <a:lnTo>
-                    <a:pt x="3841132" y="2714090"/>
-                  </a:lnTo>
-                  <a:lnTo>
-                    <a:pt x="3912754" y="2718889"/>
-                  </a:lnTo>
-                  <a:lnTo>
-                    <a:pt x="3984377" y="2723658"/>
-                  </a:lnTo>
-                  <a:lnTo>
-                    <a:pt x="4055999" y="2728397"/>
-                  </a:lnTo>
-                  <a:lnTo>
-                    <a:pt x="4127622" y="2733107"/>
-                  </a:lnTo>
-                  <a:lnTo>
-                    <a:pt x="4199245" y="2737788"/>
-                  </a:lnTo>
-                  <a:lnTo>
-                    <a:pt x="4270867" y="2742439"/>
-                  </a:lnTo>
-                  <a:lnTo>
-                    <a:pt x="4342490" y="2747061"/>
-                  </a:lnTo>
-                  <a:lnTo>
-                    <a:pt x="4414112" y="2751655"/>
-                  </a:lnTo>
-                  <a:lnTo>
-                    <a:pt x="4485735" y="2756220"/>
-                  </a:lnTo>
-                  <a:lnTo>
-                    <a:pt x="4557357" y="2760756"/>
-                  </a:lnTo>
-                  <a:lnTo>
-                    <a:pt x="4628980" y="2765264"/>
-                  </a:lnTo>
-                  <a:lnTo>
-                    <a:pt x="4700602" y="2769744"/>
-                  </a:lnTo>
-                  <a:lnTo>
-                    <a:pt x="4772225" y="2774196"/>
-                  </a:lnTo>
-                  <a:lnTo>
-                    <a:pt x="4843847" y="2778620"/>
-                  </a:lnTo>
-                  <a:lnTo>
-                    <a:pt x="4915470" y="2783017"/>
-                  </a:lnTo>
-                  <a:lnTo>
-                    <a:pt x="4987092" y="2787386"/>
-                  </a:lnTo>
-                  <a:lnTo>
-                    <a:pt x="5058715" y="2791728"/>
-                  </a:lnTo>
-                  <a:lnTo>
-                    <a:pt x="5130337" y="2796043"/>
-                  </a:lnTo>
-                  <a:lnTo>
-                    <a:pt x="5201960" y="2800331"/>
-                  </a:lnTo>
-                  <a:lnTo>
-                    <a:pt x="5273582" y="2804592"/>
-                  </a:lnTo>
-                  <a:lnTo>
-                    <a:pt x="5345205" y="2808827"/>
-                  </a:lnTo>
-                  <a:lnTo>
-                    <a:pt x="5416827" y="2813035"/>
-                  </a:lnTo>
-                  <a:lnTo>
-                    <a:pt x="5488450" y="2817218"/>
-                  </a:lnTo>
-                  <a:lnTo>
-                    <a:pt x="5560073" y="2821374"/>
-                  </a:lnTo>
-                  <a:lnTo>
-                    <a:pt x="5631695" y="2825504"/>
-                  </a:lnTo>
-                  <a:lnTo>
-                    <a:pt x="5703318" y="2829608"/>
-                  </a:lnTo>
-                  <a:lnTo>
-                    <a:pt x="5774940" y="2833687"/>
-                  </a:lnTo>
-                  <a:lnTo>
-                    <a:pt x="5846563" y="2837740"/>
-                  </a:lnTo>
-                  <a:lnTo>
-                    <a:pt x="5918185" y="2841768"/>
-                  </a:lnTo>
-                  <a:lnTo>
-                    <a:pt x="5989808" y="2845771"/>
-                  </a:lnTo>
-                  <a:lnTo>
-                    <a:pt x="6061430" y="2849749"/>
-                  </a:lnTo>
-                  <a:lnTo>
-                    <a:pt x="6133053" y="2853702"/>
-                  </a:lnTo>
-                  <a:lnTo>
-                    <a:pt x="6204675" y="2857631"/>
-                  </a:lnTo>
-                  <a:lnTo>
-                    <a:pt x="6276298" y="2861535"/>
-                  </a:lnTo>
-                  <a:lnTo>
-                    <a:pt x="6347920" y="2865414"/>
-                  </a:lnTo>
-                  <a:lnTo>
-                    <a:pt x="6419543" y="2869270"/>
-                  </a:lnTo>
-                  <a:lnTo>
-                    <a:pt x="6491165" y="2873101"/>
-                  </a:lnTo>
-                  <a:lnTo>
-                    <a:pt x="6562788" y="2876909"/>
-                  </a:lnTo>
-                  <a:lnTo>
-                    <a:pt x="6634410" y="2880693"/>
-                  </a:lnTo>
-                  <a:lnTo>
-                    <a:pt x="6706033" y="2884453"/>
-                  </a:lnTo>
-                  <a:lnTo>
-                    <a:pt x="6777655" y="2888190"/>
-                  </a:lnTo>
-                  <a:lnTo>
-                    <a:pt x="6849278" y="2891903"/>
-                  </a:lnTo>
-                  <a:lnTo>
-                    <a:pt x="6920901" y="2895593"/>
-                  </a:lnTo>
-                  <a:lnTo>
-                    <a:pt x="6992523" y="2899261"/>
+                    <a:pt x="39967" y="66385"/>
+                  </a:lnTo>
+                  <a:lnTo>
+                    <a:pt x="111590" y="181346"/>
+                  </a:lnTo>
+                  <a:lnTo>
+                    <a:pt x="183212" y="292441"/>
+                  </a:lnTo>
+                  <a:lnTo>
+                    <a:pt x="254835" y="399797"/>
+                  </a:lnTo>
+                  <a:lnTo>
+                    <a:pt x="326457" y="503543"/>
+                  </a:lnTo>
+                  <a:lnTo>
+                    <a:pt x="398080" y="603798"/>
+                  </a:lnTo>
+                  <a:lnTo>
+                    <a:pt x="469702" y="700681"/>
+                  </a:lnTo>
+                  <a:lnTo>
+                    <a:pt x="541325" y="794304"/>
+                  </a:lnTo>
+                  <a:lnTo>
+                    <a:pt x="612947" y="884778"/>
+                  </a:lnTo>
+                  <a:lnTo>
+                    <a:pt x="684570" y="972209"/>
+                  </a:lnTo>
+                  <a:lnTo>
+                    <a:pt x="756192" y="1056698"/>
+                  </a:lnTo>
+                  <a:lnTo>
+                    <a:pt x="827815" y="1138345"/>
+                  </a:lnTo>
+                  <a:lnTo>
+                    <a:pt x="899437" y="1217245"/>
+                  </a:lnTo>
+                  <a:lnTo>
+                    <a:pt x="971060" y="1293491"/>
+                  </a:lnTo>
+                  <a:lnTo>
+                    <a:pt x="1042683" y="1367172"/>
+                  </a:lnTo>
+                  <a:lnTo>
+                    <a:pt x="1114305" y="1438375"/>
+                  </a:lnTo>
+                  <a:lnTo>
+                    <a:pt x="1185928" y="1507182"/>
+                  </a:lnTo>
+                  <a:lnTo>
+                    <a:pt x="1257550" y="1573674"/>
+                  </a:lnTo>
+                  <a:lnTo>
+                    <a:pt x="1329173" y="1637930"/>
+                  </a:lnTo>
+                  <a:lnTo>
+                    <a:pt x="1400795" y="1700024"/>
+                  </a:lnTo>
+                  <a:lnTo>
+                    <a:pt x="1472418" y="1760029"/>
+                  </a:lnTo>
+                  <a:lnTo>
+                    <a:pt x="1544040" y="1818016"/>
+                  </a:lnTo>
+                  <a:lnTo>
+                    <a:pt x="1615663" y="1874052"/>
+                  </a:lnTo>
+                  <a:lnTo>
+                    <a:pt x="1687285" y="1928202"/>
+                  </a:lnTo>
+                  <a:lnTo>
+                    <a:pt x="1758908" y="1980532"/>
+                  </a:lnTo>
+                  <a:lnTo>
+                    <a:pt x="1830530" y="2031100"/>
+                  </a:lnTo>
+                  <a:lnTo>
+                    <a:pt x="1902153" y="2079968"/>
+                  </a:lnTo>
+                  <a:lnTo>
+                    <a:pt x="1973775" y="2127192"/>
+                  </a:lnTo>
+                  <a:lnTo>
+                    <a:pt x="2045398" y="2172827"/>
+                  </a:lnTo>
+                  <a:lnTo>
+                    <a:pt x="2117020" y="2216927"/>
+                  </a:lnTo>
+                  <a:lnTo>
+                    <a:pt x="2188643" y="2259543"/>
+                  </a:lnTo>
+                  <a:lnTo>
+                    <a:pt x="2260265" y="2300726"/>
+                  </a:lnTo>
+                  <a:lnTo>
+                    <a:pt x="2331888" y="2340523"/>
+                  </a:lnTo>
+                  <a:lnTo>
+                    <a:pt x="2403511" y="2378982"/>
+                  </a:lnTo>
+                  <a:lnTo>
+                    <a:pt x="2475133" y="2416146"/>
+                  </a:lnTo>
+                  <a:lnTo>
+                    <a:pt x="2546756" y="2452061"/>
+                  </a:lnTo>
+                  <a:lnTo>
+                    <a:pt x="2618378" y="2486767"/>
+                  </a:lnTo>
+                  <a:lnTo>
+                    <a:pt x="2690001" y="2520306"/>
+                  </a:lnTo>
+                  <a:lnTo>
+                    <a:pt x="2761623" y="2552717"/>
+                  </a:lnTo>
+                  <a:lnTo>
+                    <a:pt x="2833246" y="2584037"/>
+                  </a:lnTo>
+                  <a:lnTo>
+                    <a:pt x="2904868" y="2614303"/>
+                  </a:lnTo>
+                  <a:lnTo>
+                    <a:pt x="2976491" y="2643552"/>
+                  </a:lnTo>
+                  <a:lnTo>
+                    <a:pt x="3048113" y="2657408"/>
+                  </a:lnTo>
+                  <a:lnTo>
+                    <a:pt x="3119736" y="2662390"/>
+                  </a:lnTo>
+                  <a:lnTo>
+                    <a:pt x="3191358" y="2667341"/>
+                  </a:lnTo>
+                  <a:lnTo>
+                    <a:pt x="3262981" y="2672263"/>
+                  </a:lnTo>
+                  <a:lnTo>
+                    <a:pt x="3334603" y="2677155"/>
+                  </a:lnTo>
+                  <a:lnTo>
+                    <a:pt x="3406226" y="2682017"/>
+                  </a:lnTo>
+                  <a:lnTo>
+                    <a:pt x="3477848" y="2686850"/>
+                  </a:lnTo>
+                  <a:lnTo>
+                    <a:pt x="3549471" y="2691654"/>
+                  </a:lnTo>
+                  <a:lnTo>
+                    <a:pt x="3621093" y="2696429"/>
+                  </a:lnTo>
+                  <a:lnTo>
+                    <a:pt x="3692716" y="2701176"/>
+                  </a:lnTo>
+                  <a:lnTo>
+                    <a:pt x="3764339" y="2705893"/>
+                  </a:lnTo>
+                  <a:lnTo>
+                    <a:pt x="3835961" y="2710582"/>
+                  </a:lnTo>
+                  <a:lnTo>
+                    <a:pt x="3907584" y="2715243"/>
+                  </a:lnTo>
+                  <a:lnTo>
+                    <a:pt x="3979206" y="2719876"/>
+                  </a:lnTo>
+                  <a:lnTo>
+                    <a:pt x="4050829" y="2724481"/>
+                  </a:lnTo>
+                  <a:lnTo>
+                    <a:pt x="4122451" y="2729058"/>
+                  </a:lnTo>
+                  <a:lnTo>
+                    <a:pt x="4194074" y="2733608"/>
+                  </a:lnTo>
+                  <a:lnTo>
+                    <a:pt x="4265696" y="2738130"/>
+                  </a:lnTo>
+                  <a:lnTo>
+                    <a:pt x="4337319" y="2742625"/>
+                  </a:lnTo>
+                  <a:lnTo>
+                    <a:pt x="4408941" y="2747092"/>
+                  </a:lnTo>
+                  <a:lnTo>
+                    <a:pt x="4480564" y="2751533"/>
+                  </a:lnTo>
+                  <a:lnTo>
+                    <a:pt x="4552186" y="2755947"/>
+                  </a:lnTo>
+                  <a:lnTo>
+                    <a:pt x="4623809" y="2760335"/>
+                  </a:lnTo>
+                  <a:lnTo>
+                    <a:pt x="4695431" y="2764696"/>
+                  </a:lnTo>
+                  <a:lnTo>
+                    <a:pt x="4767054" y="2769030"/>
+                  </a:lnTo>
+                  <a:lnTo>
+                    <a:pt x="4838676" y="2773339"/>
+                  </a:lnTo>
+                  <a:lnTo>
+                    <a:pt x="4910299" y="2777622"/>
+                  </a:lnTo>
+                  <a:lnTo>
+                    <a:pt x="4981921" y="2781878"/>
+                  </a:lnTo>
+                  <a:lnTo>
+                    <a:pt x="5053544" y="2786110"/>
+                  </a:lnTo>
+                  <a:lnTo>
+                    <a:pt x="5125167" y="2790315"/>
+                  </a:lnTo>
+                  <a:lnTo>
+                    <a:pt x="5196789" y="2794495"/>
+                  </a:lnTo>
+                  <a:lnTo>
+                    <a:pt x="5268412" y="2798650"/>
+                  </a:lnTo>
+                  <a:lnTo>
+                    <a:pt x="5340034" y="2802781"/>
+                  </a:lnTo>
+                  <a:lnTo>
+                    <a:pt x="5411657" y="2806886"/>
+                  </a:lnTo>
+                  <a:lnTo>
+                    <a:pt x="5483279" y="2810966"/>
+                  </a:lnTo>
+                  <a:lnTo>
+                    <a:pt x="5554902" y="2815022"/>
+                  </a:lnTo>
+                  <a:lnTo>
+                    <a:pt x="5626524" y="2819053"/>
+                  </a:lnTo>
+                  <a:lnTo>
+                    <a:pt x="5698147" y="2823060"/>
+                  </a:lnTo>
+                  <a:lnTo>
+                    <a:pt x="5769769" y="2827043"/>
+                  </a:lnTo>
+                  <a:lnTo>
+                    <a:pt x="5841392" y="2831002"/>
+                  </a:lnTo>
+                  <a:lnTo>
+                    <a:pt x="5913014" y="2834937"/>
+                  </a:lnTo>
+                  <a:lnTo>
+                    <a:pt x="5984637" y="2838848"/>
+                  </a:lnTo>
+                  <a:lnTo>
+                    <a:pt x="6056259" y="2842736"/>
+                  </a:lnTo>
+                  <a:lnTo>
+                    <a:pt x="6127882" y="2846600"/>
+                  </a:lnTo>
+                  <a:lnTo>
+                    <a:pt x="6199504" y="2850441"/>
+                  </a:lnTo>
+                  <a:lnTo>
+                    <a:pt x="6271127" y="2854259"/>
+                  </a:lnTo>
+                  <a:lnTo>
+                    <a:pt x="6342749" y="2858054"/>
+                  </a:lnTo>
+                  <a:lnTo>
+                    <a:pt x="6414372" y="2861825"/>
+                  </a:lnTo>
+                  <a:lnTo>
+                    <a:pt x="6485995" y="2865575"/>
+                  </a:lnTo>
+                  <a:lnTo>
+                    <a:pt x="6557617" y="2869301"/>
+                  </a:lnTo>
+                  <a:lnTo>
+                    <a:pt x="6629240" y="2873005"/>
+                  </a:lnTo>
+                  <a:lnTo>
+                    <a:pt x="6700862" y="2876687"/>
+                  </a:lnTo>
+                  <a:lnTo>
+                    <a:pt x="6772485" y="2880347"/>
+                  </a:lnTo>
+                  <a:lnTo>
+                    <a:pt x="6844107" y="2883984"/>
+                  </a:lnTo>
+                  <a:lnTo>
+                    <a:pt x="6915730" y="2887600"/>
+                  </a:lnTo>
+                  <a:lnTo>
+                    <a:pt x="6987352" y="2891194"/>
                   </a:lnTo>
                 </a:path>
               </a:pathLst>
@@ -4339,309 +4339,309 @@
           </p:nvSpPr>
           <p:spPr>
             <a:xfrm>
-              <a:off x="1172049" y="4471572"/>
-              <a:ext cx="7090630" cy="964966"/>
+              <a:off x="1172049" y="4479042"/>
+              <a:ext cx="7090630" cy="954569"/>
             </a:xfrm>
             <a:custGeom>
               <a:avLst/>
               <a:pathLst>
-                <a:path w="7090630" h="964966">
+                <a:path w="7090630" h="954569">
                   <a:moveTo>
-                    <a:pt x="7090630" y="964966"/>
+                    <a:pt x="7090630" y="954569"/>
                   </a:moveTo>
                   <a:lnTo>
-                    <a:pt x="7019007" y="960736"/>
-                  </a:lnTo>
-                  <a:lnTo>
-                    <a:pt x="6947385" y="956358"/>
-                  </a:lnTo>
-                  <a:lnTo>
-                    <a:pt x="6875762" y="951827"/>
-                  </a:lnTo>
-                  <a:lnTo>
-                    <a:pt x="6804139" y="947137"/>
-                  </a:lnTo>
-                  <a:lnTo>
-                    <a:pt x="6732517" y="942283"/>
-                  </a:lnTo>
-                  <a:lnTo>
-                    <a:pt x="6660894" y="937258"/>
-                  </a:lnTo>
-                  <a:lnTo>
-                    <a:pt x="6589272" y="932058"/>
-                  </a:lnTo>
-                  <a:lnTo>
-                    <a:pt x="6517649" y="926675"/>
-                  </a:lnTo>
-                  <a:lnTo>
-                    <a:pt x="6446027" y="921104"/>
-                  </a:lnTo>
-                  <a:lnTo>
-                    <a:pt x="6374404" y="915337"/>
-                  </a:lnTo>
-                  <a:lnTo>
-                    <a:pt x="6302782" y="909368"/>
-                  </a:lnTo>
-                  <a:lnTo>
-                    <a:pt x="6231159" y="903191"/>
-                  </a:lnTo>
-                  <a:lnTo>
-                    <a:pt x="6159537" y="896797"/>
-                  </a:lnTo>
-                  <a:lnTo>
-                    <a:pt x="6087914" y="890178"/>
-                  </a:lnTo>
-                  <a:lnTo>
-                    <a:pt x="6016292" y="883328"/>
-                  </a:lnTo>
-                  <a:lnTo>
-                    <a:pt x="5944669" y="876238"/>
-                  </a:lnTo>
-                  <a:lnTo>
-                    <a:pt x="5873047" y="868899"/>
-                  </a:lnTo>
-                  <a:lnTo>
-                    <a:pt x="5801424" y="861304"/>
-                  </a:lnTo>
-                  <a:lnTo>
-                    <a:pt x="5729802" y="853442"/>
-                  </a:lnTo>
-                  <a:lnTo>
-                    <a:pt x="5658179" y="845304"/>
-                  </a:lnTo>
-                  <a:lnTo>
-                    <a:pt x="5586557" y="836882"/>
-                  </a:lnTo>
-                  <a:lnTo>
-                    <a:pt x="5514934" y="828164"/>
-                  </a:lnTo>
-                  <a:lnTo>
-                    <a:pt x="5443311" y="819141"/>
-                  </a:lnTo>
-                  <a:lnTo>
-                    <a:pt x="5371689" y="809802"/>
-                  </a:lnTo>
-                  <a:lnTo>
-                    <a:pt x="5300066" y="800136"/>
-                  </a:lnTo>
-                  <a:lnTo>
-                    <a:pt x="5228444" y="790131"/>
-                  </a:lnTo>
-                  <a:lnTo>
-                    <a:pt x="5156821" y="779775"/>
-                  </a:lnTo>
-                  <a:lnTo>
-                    <a:pt x="5085199" y="769056"/>
-                  </a:lnTo>
-                  <a:lnTo>
-                    <a:pt x="5013576" y="757962"/>
-                  </a:lnTo>
-                  <a:lnTo>
-                    <a:pt x="4941954" y="746479"/>
-                  </a:lnTo>
-                  <a:lnTo>
-                    <a:pt x="4870331" y="734594"/>
-                  </a:lnTo>
-                  <a:lnTo>
-                    <a:pt x="4798709" y="722292"/>
-                  </a:lnTo>
-                  <a:lnTo>
-                    <a:pt x="4727086" y="709559"/>
-                  </a:lnTo>
-                  <a:lnTo>
-                    <a:pt x="4655464" y="696381"/>
-                  </a:lnTo>
-                  <a:lnTo>
-                    <a:pt x="4583841" y="682740"/>
-                  </a:lnTo>
-                  <a:lnTo>
-                    <a:pt x="4512219" y="668621"/>
-                  </a:lnTo>
-                  <a:lnTo>
-                    <a:pt x="4440596" y="654008"/>
-                  </a:lnTo>
-                  <a:lnTo>
-                    <a:pt x="4368974" y="638883"/>
-                  </a:lnTo>
-                  <a:lnTo>
-                    <a:pt x="4297351" y="623227"/>
-                  </a:lnTo>
-                  <a:lnTo>
-                    <a:pt x="4225729" y="607023"/>
-                  </a:lnTo>
-                  <a:lnTo>
-                    <a:pt x="4154106" y="590252"/>
-                  </a:lnTo>
-                  <a:lnTo>
-                    <a:pt x="4082483" y="572892"/>
-                  </a:lnTo>
-                  <a:lnTo>
-                    <a:pt x="4010861" y="554925"/>
-                  </a:lnTo>
-                  <a:lnTo>
-                    <a:pt x="3939238" y="536328"/>
-                  </a:lnTo>
-                  <a:lnTo>
-                    <a:pt x="3867616" y="517079"/>
-                  </a:lnTo>
-                  <a:lnTo>
-                    <a:pt x="3795993" y="497155"/>
-                  </a:lnTo>
-                  <a:lnTo>
-                    <a:pt x="3724371" y="476534"/>
-                  </a:lnTo>
-                  <a:lnTo>
-                    <a:pt x="3652748" y="455190"/>
-                  </a:lnTo>
-                  <a:lnTo>
-                    <a:pt x="3581126" y="433098"/>
-                  </a:lnTo>
-                  <a:lnTo>
-                    <a:pt x="3509503" y="410232"/>
-                  </a:lnTo>
-                  <a:lnTo>
-                    <a:pt x="3437881" y="386565"/>
-                  </a:lnTo>
-                  <a:lnTo>
-                    <a:pt x="3366258" y="362069"/>
-                  </a:lnTo>
-                  <a:lnTo>
-                    <a:pt x="3294636" y="336714"/>
-                  </a:lnTo>
-                  <a:lnTo>
-                    <a:pt x="3223013" y="310471"/>
-                  </a:lnTo>
-                  <a:lnTo>
-                    <a:pt x="3151391" y="283309"/>
-                  </a:lnTo>
-                  <a:lnTo>
-                    <a:pt x="3079768" y="256028"/>
-                  </a:lnTo>
-                  <a:lnTo>
-                    <a:pt x="3008146" y="250823"/>
-                  </a:lnTo>
-                  <a:lnTo>
-                    <a:pt x="2936523" y="245585"/>
-                  </a:lnTo>
-                  <a:lnTo>
-                    <a:pt x="2864901" y="240314"/>
-                  </a:lnTo>
-                  <a:lnTo>
-                    <a:pt x="2793278" y="235009"/>
-                  </a:lnTo>
-                  <a:lnTo>
-                    <a:pt x="2721655" y="229672"/>
-                  </a:lnTo>
-                  <a:lnTo>
-                    <a:pt x="2650033" y="224301"/>
-                  </a:lnTo>
-                  <a:lnTo>
-                    <a:pt x="2578410" y="218896"/>
-                  </a:lnTo>
-                  <a:lnTo>
-                    <a:pt x="2506788" y="213458"/>
-                  </a:lnTo>
-                  <a:lnTo>
-                    <a:pt x="2435165" y="207985"/>
-                  </a:lnTo>
-                  <a:lnTo>
-                    <a:pt x="2363543" y="202478"/>
-                  </a:lnTo>
-                  <a:lnTo>
-                    <a:pt x="2291920" y="196937"/>
-                  </a:lnTo>
-                  <a:lnTo>
-                    <a:pt x="2220298" y="191360"/>
-                  </a:lnTo>
-                  <a:lnTo>
-                    <a:pt x="2148675" y="185749"/>
-                  </a:lnTo>
-                  <a:lnTo>
-                    <a:pt x="2077053" y="180102"/>
-                  </a:lnTo>
-                  <a:lnTo>
-                    <a:pt x="2005430" y="174420"/>
-                  </a:lnTo>
-                  <a:lnTo>
-                    <a:pt x="1933808" y="168703"/>
-                  </a:lnTo>
-                  <a:lnTo>
-                    <a:pt x="1862185" y="162949"/>
-                  </a:lnTo>
-                  <a:lnTo>
-                    <a:pt x="1790563" y="157160"/>
-                  </a:lnTo>
-                  <a:lnTo>
-                    <a:pt x="1718940" y="151334"/>
-                  </a:lnTo>
-                  <a:lnTo>
-                    <a:pt x="1647318" y="145471"/>
-                  </a:lnTo>
-                  <a:lnTo>
-                    <a:pt x="1575695" y="139572"/>
-                  </a:lnTo>
-                  <a:lnTo>
-                    <a:pt x="1504073" y="133636"/>
-                  </a:lnTo>
-                  <a:lnTo>
-                    <a:pt x="1432450" y="127662"/>
-                  </a:lnTo>
-                  <a:lnTo>
-                    <a:pt x="1360827" y="121651"/>
-                  </a:lnTo>
-                  <a:lnTo>
-                    <a:pt x="1289205" y="115603"/>
-                  </a:lnTo>
-                  <a:lnTo>
-                    <a:pt x="1217582" y="109516"/>
-                  </a:lnTo>
-                  <a:lnTo>
-                    <a:pt x="1145960" y="103391"/>
-                  </a:lnTo>
-                  <a:lnTo>
-                    <a:pt x="1074337" y="97228"/>
-                  </a:lnTo>
-                  <a:lnTo>
-                    <a:pt x="1002715" y="91026"/>
-                  </a:lnTo>
-                  <a:lnTo>
-                    <a:pt x="931092" y="84785"/>
-                  </a:lnTo>
-                  <a:lnTo>
-                    <a:pt x="859470" y="78505"/>
-                  </a:lnTo>
-                  <a:lnTo>
-                    <a:pt x="787847" y="72186"/>
-                  </a:lnTo>
-                  <a:lnTo>
-                    <a:pt x="716225" y="65827"/>
-                  </a:lnTo>
-                  <a:lnTo>
-                    <a:pt x="644602" y="59428"/>
-                  </a:lnTo>
-                  <a:lnTo>
-                    <a:pt x="572980" y="52988"/>
-                  </a:lnTo>
-                  <a:lnTo>
-                    <a:pt x="501357" y="46509"/>
-                  </a:lnTo>
-                  <a:lnTo>
-                    <a:pt x="429735" y="39989"/>
-                  </a:lnTo>
-                  <a:lnTo>
-                    <a:pt x="358112" y="33428"/>
-                  </a:lnTo>
-                  <a:lnTo>
-                    <a:pt x="286490" y="26825"/>
-                  </a:lnTo>
-                  <a:lnTo>
-                    <a:pt x="214867" y="20182"/>
-                  </a:lnTo>
-                  <a:lnTo>
-                    <a:pt x="143245" y="13496"/>
-                  </a:lnTo>
-                  <a:lnTo>
-                    <a:pt x="71622" y="6769"/>
+                    <a:pt x="7019007" y="950265"/>
+                  </a:lnTo>
+                  <a:lnTo>
+                    <a:pt x="6947385" y="945811"/>
+                  </a:lnTo>
+                  <a:lnTo>
+                    <a:pt x="6875762" y="941203"/>
+                  </a:lnTo>
+                  <a:lnTo>
+                    <a:pt x="6804139" y="936433"/>
+                  </a:lnTo>
+                  <a:lnTo>
+                    <a:pt x="6732517" y="931498"/>
+                  </a:lnTo>
+                  <a:lnTo>
+                    <a:pt x="6660894" y="926391"/>
+                  </a:lnTo>
+                  <a:lnTo>
+                    <a:pt x="6589272" y="921106"/>
+                  </a:lnTo>
+                  <a:lnTo>
+                    <a:pt x="6517649" y="915637"/>
+                  </a:lnTo>
+                  <a:lnTo>
+                    <a:pt x="6446027" y="909978"/>
+                  </a:lnTo>
+                  <a:lnTo>
+                    <a:pt x="6374404" y="904121"/>
+                  </a:lnTo>
+                  <a:lnTo>
+                    <a:pt x="6302782" y="898061"/>
+                  </a:lnTo>
+                  <a:lnTo>
+                    <a:pt x="6231159" y="891790"/>
+                  </a:lnTo>
+                  <a:lnTo>
+                    <a:pt x="6159537" y="885301"/>
+                  </a:lnTo>
+                  <a:lnTo>
+                    <a:pt x="6087914" y="878585"/>
+                  </a:lnTo>
+                  <a:lnTo>
+                    <a:pt x="6016292" y="871636"/>
+                  </a:lnTo>
+                  <a:lnTo>
+                    <a:pt x="5944669" y="864445"/>
+                  </a:lnTo>
+                  <a:lnTo>
+                    <a:pt x="5873047" y="857004"/>
+                  </a:lnTo>
+                  <a:lnTo>
+                    <a:pt x="5801424" y="849303"/>
+                  </a:lnTo>
+                  <a:lnTo>
+                    <a:pt x="5729802" y="841335"/>
+                  </a:lnTo>
+                  <a:lnTo>
+                    <a:pt x="5658179" y="833089"/>
+                  </a:lnTo>
+                  <a:lnTo>
+                    <a:pt x="5586557" y="824556"/>
+                  </a:lnTo>
+                  <a:lnTo>
+                    <a:pt x="5514934" y="815726"/>
+                  </a:lnTo>
+                  <a:lnTo>
+                    <a:pt x="5443311" y="806589"/>
+                  </a:lnTo>
+                  <a:lnTo>
+                    <a:pt x="5371689" y="797133"/>
+                  </a:lnTo>
+                  <a:lnTo>
+                    <a:pt x="5300066" y="787349"/>
+                  </a:lnTo>
+                  <a:lnTo>
+                    <a:pt x="5228444" y="777223"/>
+                  </a:lnTo>
+                  <a:lnTo>
+                    <a:pt x="5156821" y="766746"/>
+                  </a:lnTo>
+                  <a:lnTo>
+                    <a:pt x="5085199" y="755903"/>
+                  </a:lnTo>
+                  <a:lnTo>
+                    <a:pt x="5013576" y="744683"/>
+                  </a:lnTo>
+                  <a:lnTo>
+                    <a:pt x="4941954" y="733073"/>
+                  </a:lnTo>
+                  <a:lnTo>
+                    <a:pt x="4870331" y="721058"/>
+                  </a:lnTo>
+                  <a:lnTo>
+                    <a:pt x="4798709" y="708626"/>
+                  </a:lnTo>
+                  <a:lnTo>
+                    <a:pt x="4727086" y="695760"/>
+                  </a:lnTo>
+                  <a:lnTo>
+                    <a:pt x="4655464" y="682446"/>
+                  </a:lnTo>
+                  <a:lnTo>
+                    <a:pt x="4583841" y="668669"/>
+                  </a:lnTo>
+                  <a:lnTo>
+                    <a:pt x="4512219" y="654413"/>
+                  </a:lnTo>
+                  <a:lnTo>
+                    <a:pt x="4440596" y="639660"/>
+                  </a:lnTo>
+                  <a:lnTo>
+                    <a:pt x="4368974" y="624393"/>
+                  </a:lnTo>
+                  <a:lnTo>
+                    <a:pt x="4297351" y="608595"/>
+                  </a:lnTo>
+                  <a:lnTo>
+                    <a:pt x="4225729" y="592247"/>
+                  </a:lnTo>
+                  <a:lnTo>
+                    <a:pt x="4154106" y="575330"/>
+                  </a:lnTo>
+                  <a:lnTo>
+                    <a:pt x="4082483" y="557825"/>
+                  </a:lnTo>
+                  <a:lnTo>
+                    <a:pt x="4010861" y="539709"/>
+                  </a:lnTo>
+                  <a:lnTo>
+                    <a:pt x="3939238" y="520963"/>
+                  </a:lnTo>
+                  <a:lnTo>
+                    <a:pt x="3867616" y="501565"/>
+                  </a:lnTo>
+                  <a:lnTo>
+                    <a:pt x="3795993" y="481491"/>
+                  </a:lnTo>
+                  <a:lnTo>
+                    <a:pt x="3724371" y="460719"/>
+                  </a:lnTo>
+                  <a:lnTo>
+                    <a:pt x="3652748" y="439223"/>
+                  </a:lnTo>
+                  <a:lnTo>
+                    <a:pt x="3581126" y="416979"/>
+                  </a:lnTo>
+                  <a:lnTo>
+                    <a:pt x="3509503" y="393961"/>
+                  </a:lnTo>
+                  <a:lnTo>
+                    <a:pt x="3437881" y="370141"/>
+                  </a:lnTo>
+                  <a:lnTo>
+                    <a:pt x="3366258" y="345492"/>
+                  </a:lnTo>
+                  <a:lnTo>
+                    <a:pt x="3294636" y="319985"/>
+                  </a:lnTo>
+                  <a:lnTo>
+                    <a:pt x="3223013" y="293590"/>
+                  </a:lnTo>
+                  <a:lnTo>
+                    <a:pt x="3151391" y="266277"/>
+                  </a:lnTo>
+                  <a:lnTo>
+                    <a:pt x="3079768" y="246857"/>
+                  </a:lnTo>
+                  <a:lnTo>
+                    <a:pt x="3008146" y="241815"/>
+                  </a:lnTo>
+                  <a:lnTo>
+                    <a:pt x="2936523" y="236742"/>
+                  </a:lnTo>
+                  <a:lnTo>
+                    <a:pt x="2864901" y="231639"/>
+                  </a:lnTo>
+                  <a:lnTo>
+                    <a:pt x="2793278" y="226505"/>
+                  </a:lnTo>
+                  <a:lnTo>
+                    <a:pt x="2721655" y="221339"/>
+                  </a:lnTo>
+                  <a:lnTo>
+                    <a:pt x="2650033" y="216142"/>
+                  </a:lnTo>
+                  <a:lnTo>
+                    <a:pt x="2578410" y="210914"/>
+                  </a:lnTo>
+                  <a:lnTo>
+                    <a:pt x="2506788" y="205654"/>
+                  </a:lnTo>
+                  <a:lnTo>
+                    <a:pt x="2435165" y="200362"/>
+                  </a:lnTo>
+                  <a:lnTo>
+                    <a:pt x="2363543" y="195038"/>
+                  </a:lnTo>
+                  <a:lnTo>
+                    <a:pt x="2291920" y="189681"/>
+                  </a:lnTo>
+                  <a:lnTo>
+                    <a:pt x="2220298" y="184292"/>
+                  </a:lnTo>
+                  <a:lnTo>
+                    <a:pt x="2148675" y="178871"/>
+                  </a:lnTo>
+                  <a:lnTo>
+                    <a:pt x="2077053" y="173417"/>
+                  </a:lnTo>
+                  <a:lnTo>
+                    <a:pt x="2005430" y="167929"/>
+                  </a:lnTo>
+                  <a:lnTo>
+                    <a:pt x="1933808" y="162408"/>
+                  </a:lnTo>
+                  <a:lnTo>
+                    <a:pt x="1862185" y="156854"/>
+                  </a:lnTo>
+                  <a:lnTo>
+                    <a:pt x="1790563" y="151266"/>
+                  </a:lnTo>
+                  <a:lnTo>
+                    <a:pt x="1718940" y="145644"/>
+                  </a:lnTo>
+                  <a:lnTo>
+                    <a:pt x="1647318" y="139988"/>
+                  </a:lnTo>
+                  <a:lnTo>
+                    <a:pt x="1575695" y="134298"/>
+                  </a:lnTo>
+                  <a:lnTo>
+                    <a:pt x="1504073" y="128573"/>
+                  </a:lnTo>
+                  <a:lnTo>
+                    <a:pt x="1432450" y="122814"/>
+                  </a:lnTo>
+                  <a:lnTo>
+                    <a:pt x="1360827" y="117019"/>
+                  </a:lnTo>
+                  <a:lnTo>
+                    <a:pt x="1289205" y="111190"/>
+                  </a:lnTo>
+                  <a:lnTo>
+                    <a:pt x="1217582" y="105325"/>
+                  </a:lnTo>
+                  <a:lnTo>
+                    <a:pt x="1145960" y="99425"/>
+                  </a:lnTo>
+                  <a:lnTo>
+                    <a:pt x="1074337" y="93488"/>
+                  </a:lnTo>
+                  <a:lnTo>
+                    <a:pt x="1002715" y="87516"/>
+                  </a:lnTo>
+                  <a:lnTo>
+                    <a:pt x="931092" y="81508"/>
+                  </a:lnTo>
+                  <a:lnTo>
+                    <a:pt x="859470" y="75463"/>
+                  </a:lnTo>
+                  <a:lnTo>
+                    <a:pt x="787847" y="69381"/>
+                  </a:lnTo>
+                  <a:lnTo>
+                    <a:pt x="716225" y="63263"/>
+                  </a:lnTo>
+                  <a:lnTo>
+                    <a:pt x="644602" y="57107"/>
+                  </a:lnTo>
+                  <a:lnTo>
+                    <a:pt x="572980" y="50914"/>
+                  </a:lnTo>
+                  <a:lnTo>
+                    <a:pt x="501357" y="44684"/>
+                  </a:lnTo>
+                  <a:lnTo>
+                    <a:pt x="429735" y="38415"/>
+                  </a:lnTo>
+                  <a:lnTo>
+                    <a:pt x="358112" y="32109"/>
+                  </a:lnTo>
+                  <a:lnTo>
+                    <a:pt x="286490" y="25765"/>
+                  </a:lnTo>
+                  <a:lnTo>
+                    <a:pt x="214867" y="19382"/>
+                  </a:lnTo>
+                  <a:lnTo>
+                    <a:pt x="143245" y="12960"/>
+                  </a:lnTo>
+                  <a:lnTo>
+                    <a:pt x="71622" y="6499"/>
                   </a:lnTo>
                   <a:lnTo>
                     <a:pt x="0" y="0"/>
@@ -4664,312 +4664,312 @@
           </p:nvSpPr>
           <p:spPr>
             <a:xfrm>
-              <a:off x="1172049" y="3566175"/>
-              <a:ext cx="7090630" cy="1725454"/>
+              <a:off x="1172049" y="3570890"/>
+              <a:ext cx="7090630" cy="1715690"/>
             </a:xfrm>
             <a:custGeom>
               <a:avLst/>
               <a:pathLst>
-                <a:path w="7090630" h="1725454">
+                <a:path w="7090630" h="1715690">
                   <a:moveTo>
                     <a:pt x="0" y="0"/>
                   </a:moveTo>
                   <a:lnTo>
-                    <a:pt x="71622" y="40103"/>
-                  </a:lnTo>
-                  <a:lnTo>
-                    <a:pt x="143245" y="79398"/>
-                  </a:lnTo>
-                  <a:lnTo>
-                    <a:pt x="214867" y="117902"/>
-                  </a:lnTo>
-                  <a:lnTo>
-                    <a:pt x="286490" y="155631"/>
-                  </a:lnTo>
-                  <a:lnTo>
-                    <a:pt x="358112" y="192599"/>
-                  </a:lnTo>
-                  <a:lnTo>
-                    <a:pt x="429735" y="228823"/>
-                  </a:lnTo>
-                  <a:lnTo>
-                    <a:pt x="501357" y="264318"/>
-                  </a:lnTo>
-                  <a:lnTo>
-                    <a:pt x="572980" y="299097"/>
-                  </a:lnTo>
-                  <a:lnTo>
-                    <a:pt x="644602" y="333176"/>
-                  </a:lnTo>
-                  <a:lnTo>
-                    <a:pt x="716225" y="366568"/>
-                  </a:lnTo>
-                  <a:lnTo>
-                    <a:pt x="787847" y="399288"/>
-                  </a:lnTo>
-                  <a:lnTo>
-                    <a:pt x="859470" y="431349"/>
-                  </a:lnTo>
-                  <a:lnTo>
-                    <a:pt x="931092" y="462765"/>
-                  </a:lnTo>
-                  <a:lnTo>
-                    <a:pt x="1002715" y="493547"/>
-                  </a:lnTo>
-                  <a:lnTo>
-                    <a:pt x="1074337" y="523709"/>
-                  </a:lnTo>
-                  <a:lnTo>
-                    <a:pt x="1145960" y="553264"/>
-                  </a:lnTo>
-                  <a:lnTo>
-                    <a:pt x="1217582" y="582224"/>
-                  </a:lnTo>
-                  <a:lnTo>
-                    <a:pt x="1289205" y="610600"/>
-                  </a:lnTo>
-                  <a:lnTo>
-                    <a:pt x="1360827" y="638405"/>
-                  </a:lnTo>
-                  <a:lnTo>
-                    <a:pt x="1432450" y="665650"/>
-                  </a:lnTo>
-                  <a:lnTo>
-                    <a:pt x="1504073" y="692346"/>
-                  </a:lnTo>
-                  <a:lnTo>
-                    <a:pt x="1575695" y="718504"/>
-                  </a:lnTo>
-                  <a:lnTo>
-                    <a:pt x="1647318" y="744136"/>
-                  </a:lnTo>
-                  <a:lnTo>
-                    <a:pt x="1718940" y="769251"/>
-                  </a:lnTo>
-                  <a:lnTo>
-                    <a:pt x="1790563" y="793860"/>
-                  </a:lnTo>
-                  <a:lnTo>
-                    <a:pt x="1862185" y="817974"/>
-                  </a:lnTo>
-                  <a:lnTo>
-                    <a:pt x="1933808" y="841602"/>
-                  </a:lnTo>
-                  <a:lnTo>
-                    <a:pt x="2005430" y="864754"/>
-                  </a:lnTo>
-                  <a:lnTo>
-                    <a:pt x="2077053" y="887440"/>
-                  </a:lnTo>
-                  <a:lnTo>
-                    <a:pt x="2148675" y="909668"/>
-                  </a:lnTo>
-                  <a:lnTo>
-                    <a:pt x="2220298" y="931450"/>
-                  </a:lnTo>
-                  <a:lnTo>
-                    <a:pt x="2291920" y="952792"/>
-                  </a:lnTo>
-                  <a:lnTo>
-                    <a:pt x="2363543" y="973705"/>
-                  </a:lnTo>
-                  <a:lnTo>
-                    <a:pt x="2435165" y="994196"/>
-                  </a:lnTo>
-                  <a:lnTo>
-                    <a:pt x="2506788" y="1014274"/>
-                  </a:lnTo>
-                  <a:lnTo>
-                    <a:pt x="2578410" y="1033949"/>
-                  </a:lnTo>
-                  <a:lnTo>
-                    <a:pt x="2650033" y="1053227"/>
-                  </a:lnTo>
-                  <a:lnTo>
-                    <a:pt x="2721655" y="1072116"/>
-                  </a:lnTo>
-                  <a:lnTo>
-                    <a:pt x="2793278" y="1090625"/>
-                  </a:lnTo>
-                  <a:lnTo>
-                    <a:pt x="2864901" y="1108762"/>
-                  </a:lnTo>
-                  <a:lnTo>
-                    <a:pt x="2936523" y="1126533"/>
-                  </a:lnTo>
-                  <a:lnTo>
-                    <a:pt x="3008146" y="1143946"/>
-                  </a:lnTo>
-                  <a:lnTo>
-                    <a:pt x="3079768" y="1161008"/>
-                  </a:lnTo>
-                  <a:lnTo>
-                    <a:pt x="3151391" y="1177727"/>
-                  </a:lnTo>
-                  <a:lnTo>
-                    <a:pt x="3223013" y="1194109"/>
-                  </a:lnTo>
-                  <a:lnTo>
-                    <a:pt x="3294636" y="1210161"/>
-                  </a:lnTo>
-                  <a:lnTo>
-                    <a:pt x="3366258" y="1225890"/>
-                  </a:lnTo>
-                  <a:lnTo>
-                    <a:pt x="3437881" y="1241302"/>
-                  </a:lnTo>
-                  <a:lnTo>
-                    <a:pt x="3509503" y="1256404"/>
-                  </a:lnTo>
-                  <a:lnTo>
-                    <a:pt x="3581126" y="1271201"/>
-                  </a:lnTo>
-                  <a:lnTo>
-                    <a:pt x="3652748" y="1285700"/>
-                  </a:lnTo>
-                  <a:lnTo>
-                    <a:pt x="3724371" y="1299907"/>
-                  </a:lnTo>
-                  <a:lnTo>
-                    <a:pt x="3795993" y="1313829"/>
-                  </a:lnTo>
-                  <a:lnTo>
-                    <a:pt x="3867616" y="1327469"/>
-                  </a:lnTo>
-                  <a:lnTo>
-                    <a:pt x="3939238" y="1340835"/>
-                  </a:lnTo>
-                  <a:lnTo>
-                    <a:pt x="4010861" y="1353932"/>
-                  </a:lnTo>
-                  <a:lnTo>
-                    <a:pt x="4082483" y="1366765"/>
-                  </a:lnTo>
-                  <a:lnTo>
-                    <a:pt x="4154106" y="1379340"/>
-                  </a:lnTo>
-                  <a:lnTo>
-                    <a:pt x="4225729" y="1391661"/>
-                  </a:lnTo>
-                  <a:lnTo>
-                    <a:pt x="4297351" y="1403734"/>
-                  </a:lnTo>
-                  <a:lnTo>
-                    <a:pt x="4368974" y="1415564"/>
-                  </a:lnTo>
-                  <a:lnTo>
-                    <a:pt x="4440596" y="1427155"/>
-                  </a:lnTo>
-                  <a:lnTo>
-                    <a:pt x="4512219" y="1438514"/>
-                  </a:lnTo>
-                  <a:lnTo>
-                    <a:pt x="4583841" y="1449643"/>
-                  </a:lnTo>
-                  <a:lnTo>
-                    <a:pt x="4655464" y="1460548"/>
-                  </a:lnTo>
-                  <a:lnTo>
-                    <a:pt x="4727086" y="1471234"/>
-                  </a:lnTo>
-                  <a:lnTo>
-                    <a:pt x="4798709" y="1481704"/>
-                  </a:lnTo>
-                  <a:lnTo>
-                    <a:pt x="4870331" y="1491964"/>
-                  </a:lnTo>
-                  <a:lnTo>
-                    <a:pt x="4941954" y="1502016"/>
-                  </a:lnTo>
-                  <a:lnTo>
-                    <a:pt x="5013576" y="1511867"/>
-                  </a:lnTo>
-                  <a:lnTo>
-                    <a:pt x="5085199" y="1521519"/>
-                  </a:lnTo>
-                  <a:lnTo>
-                    <a:pt x="5156821" y="1530976"/>
-                  </a:lnTo>
-                  <a:lnTo>
-                    <a:pt x="5228444" y="1540243"/>
-                  </a:lnTo>
-                  <a:lnTo>
-                    <a:pt x="5300066" y="1549324"/>
-                  </a:lnTo>
-                  <a:lnTo>
-                    <a:pt x="5371689" y="1558221"/>
-                  </a:lnTo>
-                  <a:lnTo>
-                    <a:pt x="5443311" y="1566940"/>
-                  </a:lnTo>
-                  <a:lnTo>
-                    <a:pt x="5514934" y="1575482"/>
-                  </a:lnTo>
-                  <a:lnTo>
-                    <a:pt x="5586557" y="1583853"/>
-                  </a:lnTo>
-                  <a:lnTo>
-                    <a:pt x="5658179" y="1592055"/>
-                  </a:lnTo>
-                  <a:lnTo>
-                    <a:pt x="5729802" y="1600092"/>
-                  </a:lnTo>
-                  <a:lnTo>
-                    <a:pt x="5801424" y="1607967"/>
-                  </a:lnTo>
-                  <a:lnTo>
-                    <a:pt x="5873047" y="1615683"/>
-                  </a:lnTo>
-                  <a:lnTo>
-                    <a:pt x="5944669" y="1623244"/>
-                  </a:lnTo>
-                  <a:lnTo>
-                    <a:pt x="6016292" y="1630653"/>
-                  </a:lnTo>
-                  <a:lnTo>
-                    <a:pt x="6087914" y="1637912"/>
-                  </a:lnTo>
-                  <a:lnTo>
-                    <a:pt x="6159537" y="1645025"/>
-                  </a:lnTo>
-                  <a:lnTo>
-                    <a:pt x="6231159" y="1651995"/>
-                  </a:lnTo>
-                  <a:lnTo>
-                    <a:pt x="6302782" y="1658825"/>
-                  </a:lnTo>
-                  <a:lnTo>
-                    <a:pt x="6374404" y="1665517"/>
-                  </a:lnTo>
-                  <a:lnTo>
-                    <a:pt x="6446027" y="1672074"/>
-                  </a:lnTo>
-                  <a:lnTo>
-                    <a:pt x="6517649" y="1678499"/>
-                  </a:lnTo>
-                  <a:lnTo>
-                    <a:pt x="6589272" y="1684795"/>
-                  </a:lnTo>
-                  <a:lnTo>
-                    <a:pt x="6660894" y="1690964"/>
-                  </a:lnTo>
-                  <a:lnTo>
-                    <a:pt x="6732517" y="1697008"/>
-                  </a:lnTo>
-                  <a:lnTo>
-                    <a:pt x="6804139" y="1702931"/>
-                  </a:lnTo>
-                  <a:lnTo>
-                    <a:pt x="6875762" y="1708735"/>
-                  </a:lnTo>
-                  <a:lnTo>
-                    <a:pt x="6947385" y="1714422"/>
-                  </a:lnTo>
-                  <a:lnTo>
-                    <a:pt x="7019007" y="1719994"/>
-                  </a:lnTo>
-                  <a:lnTo>
-                    <a:pt x="7090630" y="1725454"/>
+                    <a:pt x="71622" y="39591"/>
+                  </a:lnTo>
+                  <a:lnTo>
+                    <a:pt x="143245" y="78393"/>
+                  </a:lnTo>
+                  <a:lnTo>
+                    <a:pt x="214867" y="116422"/>
+                  </a:lnTo>
+                  <a:lnTo>
+                    <a:pt x="286490" y="153693"/>
+                  </a:lnTo>
+                  <a:lnTo>
+                    <a:pt x="358112" y="190221"/>
+                  </a:lnTo>
+                  <a:lnTo>
+                    <a:pt x="429735" y="226021"/>
+                  </a:lnTo>
+                  <a:lnTo>
+                    <a:pt x="501357" y="261107"/>
+                  </a:lnTo>
+                  <a:lnTo>
+                    <a:pt x="572980" y="295494"/>
+                  </a:lnTo>
+                  <a:lnTo>
+                    <a:pt x="644602" y="329196"/>
+                  </a:lnTo>
+                  <a:lnTo>
+                    <a:pt x="716225" y="362226"/>
+                  </a:lnTo>
+                  <a:lnTo>
+                    <a:pt x="787847" y="394598"/>
+                  </a:lnTo>
+                  <a:lnTo>
+                    <a:pt x="859470" y="426324"/>
+                  </a:lnTo>
+                  <a:lnTo>
+                    <a:pt x="931092" y="457418"/>
+                  </a:lnTo>
+                  <a:lnTo>
+                    <a:pt x="1002715" y="487892"/>
+                  </a:lnTo>
+                  <a:lnTo>
+                    <a:pt x="1074337" y="517759"/>
+                  </a:lnTo>
+                  <a:lnTo>
+                    <a:pt x="1145960" y="547031"/>
+                  </a:lnTo>
+                  <a:lnTo>
+                    <a:pt x="1217582" y="575719"/>
+                  </a:lnTo>
+                  <a:lnTo>
+                    <a:pt x="1289205" y="603835"/>
+                  </a:lnTo>
+                  <a:lnTo>
+                    <a:pt x="1360827" y="631391"/>
+                  </a:lnTo>
+                  <a:lnTo>
+                    <a:pt x="1432450" y="658398"/>
+                  </a:lnTo>
+                  <a:lnTo>
+                    <a:pt x="1504073" y="684867"/>
+                  </a:lnTo>
+                  <a:lnTo>
+                    <a:pt x="1575695" y="710807"/>
+                  </a:lnTo>
+                  <a:lnTo>
+                    <a:pt x="1647318" y="736231"/>
+                  </a:lnTo>
+                  <a:lnTo>
+                    <a:pt x="1718940" y="761148"/>
+                  </a:lnTo>
+                  <a:lnTo>
+                    <a:pt x="1790563" y="785569"/>
+                  </a:lnTo>
+                  <a:lnTo>
+                    <a:pt x="1862185" y="809502"/>
+                  </a:lnTo>
+                  <a:lnTo>
+                    <a:pt x="1933808" y="832959"/>
+                  </a:lnTo>
+                  <a:lnTo>
+                    <a:pt x="2005430" y="855948"/>
+                  </a:lnTo>
+                  <a:lnTo>
+                    <a:pt x="2077053" y="878479"/>
+                  </a:lnTo>
+                  <a:lnTo>
+                    <a:pt x="2148675" y="900561"/>
+                  </a:lnTo>
+                  <a:lnTo>
+                    <a:pt x="2220298" y="922203"/>
+                  </a:lnTo>
+                  <a:lnTo>
+                    <a:pt x="2291920" y="943413"/>
+                  </a:lnTo>
+                  <a:lnTo>
+                    <a:pt x="2363543" y="964201"/>
+                  </a:lnTo>
+                  <a:lnTo>
+                    <a:pt x="2435165" y="984574"/>
+                  </a:lnTo>
+                  <a:lnTo>
+                    <a:pt x="2506788" y="1004541"/>
+                  </a:lnTo>
+                  <a:lnTo>
+                    <a:pt x="2578410" y="1024111"/>
+                  </a:lnTo>
+                  <a:lnTo>
+                    <a:pt x="2650033" y="1043290"/>
+                  </a:lnTo>
+                  <a:lnTo>
+                    <a:pt x="2721655" y="1062087"/>
+                  </a:lnTo>
+                  <a:lnTo>
+                    <a:pt x="2793278" y="1080509"/>
+                  </a:lnTo>
+                  <a:lnTo>
+                    <a:pt x="2864901" y="1098564"/>
+                  </a:lnTo>
+                  <a:lnTo>
+                    <a:pt x="2936523" y="1116259"/>
+                  </a:lnTo>
+                  <a:lnTo>
+                    <a:pt x="3008146" y="1133602"/>
+                  </a:lnTo>
+                  <a:lnTo>
+                    <a:pt x="3079768" y="1150598"/>
+                  </a:lnTo>
+                  <a:lnTo>
+                    <a:pt x="3151391" y="1167257"/>
+                  </a:lnTo>
+                  <a:lnTo>
+                    <a:pt x="3223013" y="1183583"/>
+                  </a:lnTo>
+                  <a:lnTo>
+                    <a:pt x="3294636" y="1199583"/>
+                  </a:lnTo>
+                  <a:lnTo>
+                    <a:pt x="3366258" y="1215265"/>
+                  </a:lnTo>
+                  <a:lnTo>
+                    <a:pt x="3437881" y="1230634"/>
+                  </a:lnTo>
+                  <a:lnTo>
+                    <a:pt x="3509503" y="1245697"/>
+                  </a:lnTo>
+                  <a:lnTo>
+                    <a:pt x="3581126" y="1260460"/>
+                  </a:lnTo>
+                  <a:lnTo>
+                    <a:pt x="3652748" y="1274928"/>
+                  </a:lnTo>
+                  <a:lnTo>
+                    <a:pt x="3724371" y="1289108"/>
+                  </a:lnTo>
+                  <a:lnTo>
+                    <a:pt x="3795993" y="1303005"/>
+                  </a:lnTo>
+                  <a:lnTo>
+                    <a:pt x="3867616" y="1316626"/>
+                  </a:lnTo>
+                  <a:lnTo>
+                    <a:pt x="3939238" y="1329975"/>
+                  </a:lnTo>
+                  <a:lnTo>
+                    <a:pt x="4010861" y="1343057"/>
+                  </a:lnTo>
+                  <a:lnTo>
+                    <a:pt x="4082483" y="1355879"/>
+                  </a:lnTo>
+                  <a:lnTo>
+                    <a:pt x="4154106" y="1368446"/>
+                  </a:lnTo>
+                  <a:lnTo>
+                    <a:pt x="4225729" y="1380762"/>
+                  </a:lnTo>
+                  <a:lnTo>
+                    <a:pt x="4297351" y="1392832"/>
+                  </a:lnTo>
+                  <a:lnTo>
+                    <a:pt x="4368974" y="1404662"/>
+                  </a:lnTo>
+                  <a:lnTo>
+                    <a:pt x="4440596" y="1416257"/>
+                  </a:lnTo>
+                  <a:lnTo>
+                    <a:pt x="4512219" y="1427620"/>
+                  </a:lnTo>
+                  <a:lnTo>
+                    <a:pt x="4583841" y="1438756"/>
+                  </a:lnTo>
+                  <a:lnTo>
+                    <a:pt x="4655464" y="1449671"/>
+                  </a:lnTo>
+                  <a:lnTo>
+                    <a:pt x="4727086" y="1460368"/>
+                  </a:lnTo>
+                  <a:lnTo>
+                    <a:pt x="4798709" y="1470852"/>
+                  </a:lnTo>
+                  <a:lnTo>
+                    <a:pt x="4870331" y="1481127"/>
+                  </a:lnTo>
+                  <a:lnTo>
+                    <a:pt x="4941954" y="1491197"/>
+                  </a:lnTo>
+                  <a:lnTo>
+                    <a:pt x="5013576" y="1501066"/>
+                  </a:lnTo>
+                  <a:lnTo>
+                    <a:pt x="5085199" y="1510739"/>
+                  </a:lnTo>
+                  <a:lnTo>
+                    <a:pt x="5156821" y="1520219"/>
+                  </a:lnTo>
+                  <a:lnTo>
+                    <a:pt x="5228444" y="1529510"/>
+                  </a:lnTo>
+                  <a:lnTo>
+                    <a:pt x="5300066" y="1538615"/>
+                  </a:lnTo>
+                  <a:lnTo>
+                    <a:pt x="5371689" y="1547540"/>
+                  </a:lnTo>
+                  <a:lnTo>
+                    <a:pt x="5443311" y="1556286"/>
+                  </a:lnTo>
+                  <a:lnTo>
+                    <a:pt x="5514934" y="1564858"/>
+                  </a:lnTo>
+                  <a:lnTo>
+                    <a:pt x="5586557" y="1573259"/>
+                  </a:lnTo>
+                  <a:lnTo>
+                    <a:pt x="5658179" y="1581493"/>
+                  </a:lnTo>
+                  <a:lnTo>
+                    <a:pt x="5729802" y="1589563"/>
+                  </a:lnTo>
+                  <a:lnTo>
+                    <a:pt x="5801424" y="1597471"/>
+                  </a:lnTo>
+                  <a:lnTo>
+                    <a:pt x="5873047" y="1605223"/>
+                  </a:lnTo>
+                  <a:lnTo>
+                    <a:pt x="5944669" y="1612819"/>
+                  </a:lnTo>
+                  <a:lnTo>
+                    <a:pt x="6016292" y="1620265"/>
+                  </a:lnTo>
+                  <a:lnTo>
+                    <a:pt x="6087914" y="1627561"/>
+                  </a:lnTo>
+                  <a:lnTo>
+                    <a:pt x="6159537" y="1634713"/>
+                  </a:lnTo>
+                  <a:lnTo>
+                    <a:pt x="6231159" y="1641722"/>
+                  </a:lnTo>
+                  <a:lnTo>
+                    <a:pt x="6302782" y="1648591"/>
+                  </a:lnTo>
+                  <a:lnTo>
+                    <a:pt x="6374404" y="1655323"/>
+                  </a:lnTo>
+                  <a:lnTo>
+                    <a:pt x="6446027" y="1661921"/>
+                  </a:lnTo>
+                  <a:lnTo>
+                    <a:pt x="6517649" y="1668388"/>
+                  </a:lnTo>
+                  <a:lnTo>
+                    <a:pt x="6589272" y="1674726"/>
+                  </a:lnTo>
+                  <a:lnTo>
+                    <a:pt x="6660894" y="1680937"/>
+                  </a:lnTo>
+                  <a:lnTo>
+                    <a:pt x="6732517" y="1687024"/>
+                  </a:lnTo>
+                  <a:lnTo>
+                    <a:pt x="6804139" y="1692991"/>
+                  </a:lnTo>
+                  <a:lnTo>
+                    <a:pt x="6875762" y="1698838"/>
+                  </a:lnTo>
+                  <a:lnTo>
+                    <a:pt x="6947385" y="1704569"/>
+                  </a:lnTo>
+                  <a:lnTo>
+                    <a:pt x="7019007" y="1710185"/>
+                  </a:lnTo>
+                  <a:lnTo>
+                    <a:pt x="7090630" y="1715690"/>
                   </a:lnTo>
                 </a:path>
               </a:pathLst>
@@ -5041,7 +5041,7 @@
           </p:nvSpPr>
           <p:spPr>
             <a:xfrm>
-              <a:off x="4254372" y="2073503"/>
+              <a:off x="4278722" y="2073503"/>
               <a:ext cx="0" cy="3649639"/>
             </a:xfrm>
             <a:custGeom>
@@ -5314,7 +5314,7 @@
           </p:nvSpPr>
           <p:spPr>
             <a:xfrm>
-              <a:off x="1347083" y="5785772"/>
+              <a:off x="1347751" y="5785772"/>
               <a:ext cx="161574" cy="80101"/>
             </a:xfrm>
             <a:prstGeom prst="rect">
@@ -5360,7 +5360,7 @@
           </p:nvSpPr>
           <p:spPr>
             <a:xfrm>
-              <a:off x="2254916" y="5785772"/>
+              <a:off x="2255364" y="5785772"/>
               <a:ext cx="161574" cy="80101"/>
             </a:xfrm>
             <a:prstGeom prst="rect">
@@ -5406,7 +5406,7 @@
           </p:nvSpPr>
           <p:spPr>
             <a:xfrm>
-              <a:off x="3162750" y="5785772"/>
+              <a:off x="3162976" y="5785772"/>
               <a:ext cx="161574" cy="80101"/>
             </a:xfrm>
             <a:prstGeom prst="rect">
@@ -5452,7 +5452,7 @@
           </p:nvSpPr>
           <p:spPr>
             <a:xfrm>
-              <a:off x="4120281" y="5785772"/>
+              <a:off x="4120286" y="5785772"/>
               <a:ext cx="62179" cy="80101"/>
             </a:xfrm>
             <a:prstGeom prst="rect">
@@ -5498,7 +5498,7 @@
           </p:nvSpPr>
           <p:spPr>
             <a:xfrm>
-              <a:off x="4997024" y="5785772"/>
+              <a:off x="4996809" y="5785772"/>
               <a:ext cx="124358" cy="80101"/>
             </a:xfrm>
             <a:prstGeom prst="rect">
@@ -5544,7 +5544,7 @@
           </p:nvSpPr>
           <p:spPr>
             <a:xfrm>
-              <a:off x="5904858" y="5785772"/>
+              <a:off x="5904422" y="5785772"/>
               <a:ext cx="124358" cy="80101"/>
             </a:xfrm>
             <a:prstGeom prst="rect">
@@ -5590,7 +5590,7 @@
           </p:nvSpPr>
           <p:spPr>
             <a:xfrm>
-              <a:off x="6812691" y="5785772"/>
+              <a:off x="6812034" y="5785772"/>
               <a:ext cx="124358" cy="80101"/>
             </a:xfrm>
             <a:prstGeom prst="rect">
@@ -5636,7 +5636,7 @@
           </p:nvSpPr>
           <p:spPr>
             <a:xfrm>
-              <a:off x="7720525" y="5785772"/>
+              <a:off x="7719647" y="5785772"/>
               <a:ext cx="124358" cy="80101"/>
             </a:xfrm>
             <a:prstGeom prst="rect">
@@ -5807,7 +5807,7 @@
                   <a:latin typeface="Helvetica"/>
                   <a:cs typeface="Helvetica"/>
                 </a:rPr>
-                <a:t>subHR per 10 % decline: 1.29 (1.08-1.55), p_Bonf = 0.028 (n = 6)  |  per IQR decline (Δ = 26.4 %): 1.98 (1.23-3.17)  |  IQR: [-11.1, 15.3] %</a:t>
+                <a:t>subHR per 10 % decline: 1.29 (1.08-1.54), p_Bonf = 0.031 (n = 6)  |  per IQR decline (Δ = 26.4 %): 1.96 (1.22-3.14)  |  IQR: [-11.1, 15.4] %</a:t>
               </a:r>
             </a:p>
           </p:txBody>
